--- a/wfletch_hyena_devconf2026.pptx
+++ b/wfletch_hyena_devconf2026.pptx
@@ -5,10 +5,47 @@
     <p:sldMasterId id="2147483648" r:id="rId4"/>
   </p:sldMasterIdLst>
   <p:notesMasterIdLst>
-    <p:notesMasterId r:id="rId6"/>
+    <p:notesMasterId r:id="rId43"/>
   </p:notesMasterIdLst>
   <p:sldIdLst>
     <p:sldId id="256" r:id="rId5"/>
+    <p:sldId id="289" r:id="rId6"/>
+    <p:sldId id="290" r:id="rId7"/>
+    <p:sldId id="291" r:id="rId8"/>
+    <p:sldId id="258" r:id="rId9"/>
+    <p:sldId id="259" r:id="rId10"/>
+    <p:sldId id="260" r:id="rId11"/>
+    <p:sldId id="292" r:id="rId12"/>
+    <p:sldId id="265" r:id="rId13"/>
+    <p:sldId id="264" r:id="rId14"/>
+    <p:sldId id="266" r:id="rId15"/>
+    <p:sldId id="267" r:id="rId16"/>
+    <p:sldId id="288" r:id="rId17"/>
+    <p:sldId id="293" r:id="rId18"/>
+    <p:sldId id="294" r:id="rId19"/>
+    <p:sldId id="268" r:id="rId20"/>
+    <p:sldId id="269" r:id="rId21"/>
+    <p:sldId id="270" r:id="rId22"/>
+    <p:sldId id="257" r:id="rId23"/>
+    <p:sldId id="261" r:id="rId24"/>
+    <p:sldId id="271" r:id="rId25"/>
+    <p:sldId id="272" r:id="rId26"/>
+    <p:sldId id="262" r:id="rId27"/>
+    <p:sldId id="263" r:id="rId28"/>
+    <p:sldId id="274" r:id="rId29"/>
+    <p:sldId id="286" r:id="rId30"/>
+    <p:sldId id="287" r:id="rId31"/>
+    <p:sldId id="273" r:id="rId32"/>
+    <p:sldId id="275" r:id="rId33"/>
+    <p:sldId id="276" r:id="rId34"/>
+    <p:sldId id="277" r:id="rId35"/>
+    <p:sldId id="278" r:id="rId36"/>
+    <p:sldId id="284" r:id="rId37"/>
+    <p:sldId id="279" r:id="rId38"/>
+    <p:sldId id="280" r:id="rId39"/>
+    <p:sldId id="281" r:id="rId40"/>
+    <p:sldId id="282" r:id="rId41"/>
+    <p:sldId id="283" r:id="rId42"/>
   </p:sldIdLst>
   <p:sldSz cx="12192000" cy="6858000"/>
   <p:notesSz cx="6858000" cy="9144000"/>
@@ -197,7 +234,7 @@
           <a:p>
             <a:fld id="{C702EEBA-E5AB-B949-AAD0-C27417493460}" type="datetimeFigureOut">
               <a:rPr lang="en-US" smtClean="0"/>
-              <a:t>4/10/26</a:t>
+              <a:t>4/27/26</a:t>
             </a:fld>
             <a:endParaRPr lang="en-US"/>
           </a:p>
@@ -463,6 +500,93 @@
     </a:lvl9pPr>
   </p:notesStyle>
 </p:notesMaster>
+</file>
+
+<file path=ppt/notesSlides/notesSlide1.xml><?xml version="1.0" encoding="utf-8"?>
+<p:notes xmlns:a="http://schemas.openxmlformats.org/drawingml/2006/main" xmlns:r="http://schemas.openxmlformats.org/officeDocument/2006/relationships" xmlns:p="http://schemas.openxmlformats.org/presentationml/2006/main">
+  <p:cSld>
+    <p:spTree>
+      <p:nvGrpSpPr>
+        <p:cNvPr id="1" name=""/>
+        <p:cNvGrpSpPr/>
+        <p:nvPr/>
+      </p:nvGrpSpPr>
+      <p:grpSpPr>
+        <a:xfrm>
+          <a:off x="0" y="0"/>
+          <a:ext cx="0" cy="0"/>
+          <a:chOff x="0" y="0"/>
+          <a:chExt cx="0" cy="0"/>
+        </a:xfrm>
+      </p:grpSpPr>
+      <p:sp>
+        <p:nvSpPr>
+          <p:cNvPr id="2" name="Slide Image Placeholder 1"/>
+          <p:cNvSpPr>
+            <a:spLocks noGrp="1" noRot="1" noChangeAspect="1"/>
+          </p:cNvSpPr>
+          <p:nvPr>
+            <p:ph type="sldImg"/>
+          </p:nvPr>
+        </p:nvSpPr>
+        <p:spPr/>
+      </p:sp>
+      <p:sp>
+        <p:nvSpPr>
+          <p:cNvPr id="3" name="Notes Placeholder 2"/>
+          <p:cNvSpPr>
+            <a:spLocks noGrp="1"/>
+          </p:cNvSpPr>
+          <p:nvPr>
+            <p:ph type="body" idx="1"/>
+          </p:nvPr>
+        </p:nvSpPr>
+        <p:spPr/>
+        <p:txBody>
+          <a:bodyPr/>
+          <a:lstStyle/>
+          <a:p>
+            <a:r>
+              <a:rPr lang="en-US" dirty="0"/>
+              <a:t>I’m Pretty.</a:t>
+            </a:r>
+          </a:p>
+        </p:txBody>
+      </p:sp>
+      <p:sp>
+        <p:nvSpPr>
+          <p:cNvPr id="4" name="Slide Number Placeholder 3"/>
+          <p:cNvSpPr>
+            <a:spLocks noGrp="1"/>
+          </p:cNvSpPr>
+          <p:nvPr>
+            <p:ph type="sldNum" sz="quarter" idx="5"/>
+          </p:nvPr>
+        </p:nvSpPr>
+        <p:spPr/>
+        <p:txBody>
+          <a:bodyPr/>
+          <a:lstStyle/>
+          <a:p>
+            <a:fld id="{22918198-40F7-7648-AA02-D9DB717E9687}" type="slidenum">
+              <a:rPr lang="en-US" smtClean="0"/>
+              <a:t>1</a:t>
+            </a:fld>
+            <a:endParaRPr lang="en-US"/>
+          </a:p>
+        </p:txBody>
+      </p:sp>
+    </p:spTree>
+    <p:extLst>
+      <p:ext uri="{BB962C8B-B14F-4D97-AF65-F5344CB8AC3E}">
+        <p14:creationId xmlns:p14="http://schemas.microsoft.com/office/powerpoint/2010/main" val="1455674025"/>
+      </p:ext>
+    </p:extLst>
+  </p:cSld>
+  <p:clrMapOvr>
+    <a:masterClrMapping/>
+  </p:clrMapOvr>
+</p:notes>
 </file>
 
 <file path=ppt/slideLayouts/slideLayout1.xml><?xml version="1.0" encoding="utf-8"?>
@@ -2570,7 +2694,7 @@
           <a:p>
             <a:r>
               <a:rPr lang="en-US" dirty="0"/>
-              <a:t>(Draft)	</a:t>
+              <a:t>Breaking out of closed source.</a:t>
             </a:r>
           </a:p>
         </p:txBody>
@@ -2598,7 +2722,7 @@
           <a:p>
             <a:r>
               <a:rPr lang="en-US" dirty="0"/>
-              <a:t>Working Title 2026</a:t>
+              <a:t>I’m not paying for HTTP.</a:t>
             </a:r>
           </a:p>
         </p:txBody>
@@ -2607,6 +2731,4911 @@
     <p:extLst>
       <p:ext uri="{BB962C8B-B14F-4D97-AF65-F5344CB8AC3E}">
         <p14:creationId xmlns:p14="http://schemas.microsoft.com/office/powerpoint/2010/main" val="3020565012"/>
+      </p:ext>
+    </p:extLst>
+  </p:cSld>
+  <p:clrMapOvr>
+    <a:masterClrMapping/>
+  </p:clrMapOvr>
+</p:sld>
+</file>
+
+<file path=ppt/slides/slide10.xml><?xml version="1.0" encoding="utf-8"?>
+<p:sld xmlns:a="http://schemas.openxmlformats.org/drawingml/2006/main" xmlns:r="http://schemas.openxmlformats.org/officeDocument/2006/relationships" xmlns:p="http://schemas.openxmlformats.org/presentationml/2006/main">
+  <p:cSld>
+    <p:spTree>
+      <p:nvGrpSpPr>
+        <p:cNvPr id="1" name=""/>
+        <p:cNvGrpSpPr/>
+        <p:nvPr/>
+      </p:nvGrpSpPr>
+      <p:grpSpPr>
+        <a:xfrm>
+          <a:off x="0" y="0"/>
+          <a:ext cx="0" cy="0"/>
+          <a:chOff x="0" y="0"/>
+          <a:chExt cx="0" cy="0"/>
+        </a:xfrm>
+      </p:grpSpPr>
+      <p:sp>
+        <p:nvSpPr>
+          <p:cNvPr id="2" name="Title 1">
+            <a:extLst>
+              <a:ext uri="{FF2B5EF4-FFF2-40B4-BE49-F238E27FC236}">
+                <a16:creationId xmlns:a16="http://schemas.microsoft.com/office/drawing/2014/main" id="{A338F77F-1BC1-ACBD-E2E1-4BA87F9C50C3}"/>
+              </a:ext>
+            </a:extLst>
+          </p:cNvPr>
+          <p:cNvSpPr>
+            <a:spLocks noGrp="1"/>
+          </p:cNvSpPr>
+          <p:nvPr>
+            <p:ph type="title"/>
+          </p:nvPr>
+        </p:nvSpPr>
+        <p:spPr/>
+        <p:txBody>
+          <a:bodyPr/>
+          <a:lstStyle/>
+          <a:p>
+            <a:r>
+              <a:rPr lang="en-US" dirty="0"/>
+              <a:t>HYENA</a:t>
+            </a:r>
+          </a:p>
+        </p:txBody>
+      </p:sp>
+      <p:sp>
+        <p:nvSpPr>
+          <p:cNvPr id="3" name="Content Placeholder 2">
+            <a:extLst>
+              <a:ext uri="{FF2B5EF4-FFF2-40B4-BE49-F238E27FC236}">
+                <a16:creationId xmlns:a16="http://schemas.microsoft.com/office/drawing/2014/main" id="{2B32EF27-2FD3-2B8F-3006-44CFEFBC2875}"/>
+              </a:ext>
+            </a:extLst>
+          </p:cNvPr>
+          <p:cNvSpPr>
+            <a:spLocks noGrp="1"/>
+          </p:cNvSpPr>
+          <p:nvPr>
+            <p:ph idx="1"/>
+          </p:nvPr>
+        </p:nvSpPr>
+        <p:spPr/>
+        <p:txBody>
+          <a:bodyPr/>
+          <a:lstStyle/>
+          <a:p>
+            <a:r>
+              <a:rPr lang="en-US" dirty="0"/>
+              <a:t>We are a ‘</a:t>
+            </a:r>
+            <a:r>
+              <a:rPr lang="en-US" dirty="0" err="1"/>
+              <a:t>hardtech</a:t>
+            </a:r>
+            <a:r>
+              <a:rPr lang="en-US" dirty="0"/>
+              <a:t>’ spinout from UCT.</a:t>
+            </a:r>
+          </a:p>
+          <a:p>
+            <a:r>
+              <a:rPr lang="en-US" dirty="0"/>
+              <a:t>It hurts. It itches. It burns.</a:t>
+            </a:r>
+          </a:p>
+        </p:txBody>
+      </p:sp>
+      <p:sp>
+        <p:nvSpPr>
+          <p:cNvPr id="4" name="Slide Number Placeholder 3">
+            <a:extLst>
+              <a:ext uri="{FF2B5EF4-FFF2-40B4-BE49-F238E27FC236}">
+                <a16:creationId xmlns:a16="http://schemas.microsoft.com/office/drawing/2014/main" id="{4271FE13-8E62-DB72-767F-FBE2569D1457}"/>
+              </a:ext>
+            </a:extLst>
+          </p:cNvPr>
+          <p:cNvSpPr>
+            <a:spLocks noGrp="1"/>
+          </p:cNvSpPr>
+          <p:nvPr>
+            <p:ph type="sldNum" sz="quarter" idx="4"/>
+          </p:nvPr>
+        </p:nvSpPr>
+        <p:spPr/>
+        <p:txBody>
+          <a:bodyPr/>
+          <a:lstStyle/>
+          <a:p>
+            <a:fld id="{FA19DD11-D068-0E4A-8D95-134F79C17C0A}" type="slidenum">
+              <a:rPr lang="en-US" smtClean="0"/>
+              <a:pPr/>
+              <a:t>10</a:t>
+            </a:fld>
+            <a:endParaRPr lang="en-US"/>
+          </a:p>
+        </p:txBody>
+      </p:sp>
+    </p:spTree>
+    <p:extLst>
+      <p:ext uri="{BB962C8B-B14F-4D97-AF65-F5344CB8AC3E}">
+        <p14:creationId xmlns:p14="http://schemas.microsoft.com/office/powerpoint/2010/main" val="2180744950"/>
+      </p:ext>
+    </p:extLst>
+  </p:cSld>
+  <p:clrMapOvr>
+    <a:masterClrMapping/>
+  </p:clrMapOvr>
+</p:sld>
+</file>
+
+<file path=ppt/slides/slide11.xml><?xml version="1.0" encoding="utf-8"?>
+<p:sld xmlns:a="http://schemas.openxmlformats.org/drawingml/2006/main" xmlns:r="http://schemas.openxmlformats.org/officeDocument/2006/relationships" xmlns:p="http://schemas.openxmlformats.org/presentationml/2006/main">
+  <p:cSld>
+    <p:spTree>
+      <p:nvGrpSpPr>
+        <p:cNvPr id="1" name=""/>
+        <p:cNvGrpSpPr/>
+        <p:nvPr/>
+      </p:nvGrpSpPr>
+      <p:grpSpPr>
+        <a:xfrm>
+          <a:off x="0" y="0"/>
+          <a:ext cx="0" cy="0"/>
+          <a:chOff x="0" y="0"/>
+          <a:chExt cx="0" cy="0"/>
+        </a:xfrm>
+      </p:grpSpPr>
+      <p:sp>
+        <p:nvSpPr>
+          <p:cNvPr id="2" name="Title 1">
+            <a:extLst>
+              <a:ext uri="{FF2B5EF4-FFF2-40B4-BE49-F238E27FC236}">
+                <a16:creationId xmlns:a16="http://schemas.microsoft.com/office/drawing/2014/main" id="{C46D84C0-67ED-1165-4648-93E3C1BF91F6}"/>
+              </a:ext>
+            </a:extLst>
+          </p:cNvPr>
+          <p:cNvSpPr>
+            <a:spLocks noGrp="1"/>
+          </p:cNvSpPr>
+          <p:nvPr>
+            <p:ph type="title"/>
+          </p:nvPr>
+        </p:nvSpPr>
+        <p:spPr/>
+        <p:txBody>
+          <a:bodyPr/>
+          <a:lstStyle/>
+          <a:p>
+            <a:r>
+              <a:rPr lang="en-US" dirty="0"/>
+              <a:t>Industrial Automation</a:t>
+            </a:r>
+          </a:p>
+        </p:txBody>
+      </p:sp>
+      <p:sp>
+        <p:nvSpPr>
+          <p:cNvPr id="3" name="Content Placeholder 2">
+            <a:extLst>
+              <a:ext uri="{FF2B5EF4-FFF2-40B4-BE49-F238E27FC236}">
+                <a16:creationId xmlns:a16="http://schemas.microsoft.com/office/drawing/2014/main" id="{D35459E4-F49E-B916-3C28-6DB443DC7CC2}"/>
+              </a:ext>
+            </a:extLst>
+          </p:cNvPr>
+          <p:cNvSpPr>
+            <a:spLocks noGrp="1"/>
+          </p:cNvSpPr>
+          <p:nvPr>
+            <p:ph idx="1"/>
+          </p:nvPr>
+        </p:nvSpPr>
+        <p:spPr/>
+        <p:txBody>
+          <a:bodyPr/>
+          <a:lstStyle/>
+          <a:p>
+            <a:r>
+              <a:rPr lang="en-US" dirty="0"/>
+              <a:t>Computers controlling Hardware</a:t>
+            </a:r>
+          </a:p>
+          <a:p>
+            <a:r>
+              <a:rPr lang="en-US" dirty="0"/>
+              <a:t>Read Input -&gt; Process -&gt; Write Output</a:t>
+            </a:r>
+          </a:p>
+          <a:p>
+            <a:r>
+              <a:rPr lang="en-US" dirty="0"/>
+              <a:t>Everything is Async and Cyclical</a:t>
+            </a:r>
+          </a:p>
+          <a:p>
+            <a:r>
+              <a:rPr lang="en-US" dirty="0"/>
+              <a:t>Every cycle needs to start exactly ‘on time’</a:t>
+            </a:r>
+          </a:p>
+          <a:p>
+            <a:endParaRPr lang="en-US" dirty="0"/>
+          </a:p>
+        </p:txBody>
+      </p:sp>
+      <p:sp>
+        <p:nvSpPr>
+          <p:cNvPr id="4" name="Slide Number Placeholder 3">
+            <a:extLst>
+              <a:ext uri="{FF2B5EF4-FFF2-40B4-BE49-F238E27FC236}">
+                <a16:creationId xmlns:a16="http://schemas.microsoft.com/office/drawing/2014/main" id="{FF6BAABA-6FA3-FC7E-C308-769CEAABD49A}"/>
+              </a:ext>
+            </a:extLst>
+          </p:cNvPr>
+          <p:cNvSpPr>
+            <a:spLocks noGrp="1"/>
+          </p:cNvSpPr>
+          <p:nvPr>
+            <p:ph type="sldNum" sz="quarter" idx="4"/>
+          </p:nvPr>
+        </p:nvSpPr>
+        <p:spPr/>
+        <p:txBody>
+          <a:bodyPr/>
+          <a:lstStyle/>
+          <a:p>
+            <a:fld id="{FA19DD11-D068-0E4A-8D95-134F79C17C0A}" type="slidenum">
+              <a:rPr lang="en-US" smtClean="0"/>
+              <a:pPr/>
+              <a:t>11</a:t>
+            </a:fld>
+            <a:endParaRPr lang="en-US"/>
+          </a:p>
+        </p:txBody>
+      </p:sp>
+    </p:spTree>
+    <p:extLst>
+      <p:ext uri="{BB962C8B-B14F-4D97-AF65-F5344CB8AC3E}">
+        <p14:creationId xmlns:p14="http://schemas.microsoft.com/office/powerpoint/2010/main" val="4016949426"/>
+      </p:ext>
+    </p:extLst>
+  </p:cSld>
+  <p:clrMapOvr>
+    <a:masterClrMapping/>
+  </p:clrMapOvr>
+</p:sld>
+</file>
+
+<file path=ppt/slides/slide12.xml><?xml version="1.0" encoding="utf-8"?>
+<p:sld xmlns:a="http://schemas.openxmlformats.org/drawingml/2006/main" xmlns:r="http://schemas.openxmlformats.org/officeDocument/2006/relationships" xmlns:p="http://schemas.openxmlformats.org/presentationml/2006/main">
+  <p:cSld>
+    <p:spTree>
+      <p:nvGrpSpPr>
+        <p:cNvPr id="1" name=""/>
+        <p:cNvGrpSpPr/>
+        <p:nvPr/>
+      </p:nvGrpSpPr>
+      <p:grpSpPr>
+        <a:xfrm>
+          <a:off x="0" y="0"/>
+          <a:ext cx="0" cy="0"/>
+          <a:chOff x="0" y="0"/>
+          <a:chExt cx="0" cy="0"/>
+        </a:xfrm>
+      </p:grpSpPr>
+      <p:sp>
+        <p:nvSpPr>
+          <p:cNvPr id="2" name="Title 1">
+            <a:extLst>
+              <a:ext uri="{FF2B5EF4-FFF2-40B4-BE49-F238E27FC236}">
+                <a16:creationId xmlns:a16="http://schemas.microsoft.com/office/drawing/2014/main" id="{2DDFDE82-8CDC-5F63-4404-64DB2028122B}"/>
+              </a:ext>
+            </a:extLst>
+          </p:cNvPr>
+          <p:cNvSpPr>
+            <a:spLocks noGrp="1"/>
+          </p:cNvSpPr>
+          <p:nvPr>
+            <p:ph type="title"/>
+          </p:nvPr>
+        </p:nvSpPr>
+        <p:spPr/>
+        <p:txBody>
+          <a:bodyPr/>
+          <a:lstStyle/>
+          <a:p>
+            <a:r>
+              <a:rPr lang="en-US" dirty="0"/>
+              <a:t>Industrial Automation</a:t>
+            </a:r>
+          </a:p>
+        </p:txBody>
+      </p:sp>
+      <p:sp>
+        <p:nvSpPr>
+          <p:cNvPr id="3" name="Content Placeholder 2">
+            <a:extLst>
+              <a:ext uri="{FF2B5EF4-FFF2-40B4-BE49-F238E27FC236}">
+                <a16:creationId xmlns:a16="http://schemas.microsoft.com/office/drawing/2014/main" id="{AA6223C0-C49C-972E-FFF7-FD5C2A4132C7}"/>
+              </a:ext>
+            </a:extLst>
+          </p:cNvPr>
+          <p:cNvSpPr>
+            <a:spLocks noGrp="1"/>
+          </p:cNvSpPr>
+          <p:nvPr>
+            <p:ph idx="1"/>
+          </p:nvPr>
+        </p:nvSpPr>
+        <p:spPr/>
+        <p:txBody>
+          <a:bodyPr/>
+          <a:lstStyle/>
+          <a:p>
+            <a:r>
+              <a:rPr lang="en-US" dirty="0"/>
+              <a:t>This is an entire industry (268 Billion USD 2025)</a:t>
+            </a:r>
+          </a:p>
+          <a:p>
+            <a:r>
+              <a:rPr lang="en-US" dirty="0"/>
+              <a:t>Started in the 1980s, and well, stayed there.</a:t>
+            </a:r>
+          </a:p>
+          <a:p>
+            <a:r>
+              <a:rPr lang="en-US" dirty="0"/>
+              <a:t>Think…. Huge Projects.</a:t>
+            </a:r>
+          </a:p>
+          <a:p>
+            <a:endParaRPr lang="en-US" dirty="0"/>
+          </a:p>
+          <a:p>
+            <a:endParaRPr lang="en-US" dirty="0"/>
+          </a:p>
+        </p:txBody>
+      </p:sp>
+      <p:sp>
+        <p:nvSpPr>
+          <p:cNvPr id="4" name="Slide Number Placeholder 3">
+            <a:extLst>
+              <a:ext uri="{FF2B5EF4-FFF2-40B4-BE49-F238E27FC236}">
+                <a16:creationId xmlns:a16="http://schemas.microsoft.com/office/drawing/2014/main" id="{0CEA1D71-6C74-904D-3F99-DEA32C50B14A}"/>
+              </a:ext>
+            </a:extLst>
+          </p:cNvPr>
+          <p:cNvSpPr>
+            <a:spLocks noGrp="1"/>
+          </p:cNvSpPr>
+          <p:nvPr>
+            <p:ph type="sldNum" sz="quarter" idx="4"/>
+          </p:nvPr>
+        </p:nvSpPr>
+        <p:spPr/>
+        <p:txBody>
+          <a:bodyPr/>
+          <a:lstStyle/>
+          <a:p>
+            <a:fld id="{FA19DD11-D068-0E4A-8D95-134F79C17C0A}" type="slidenum">
+              <a:rPr lang="en-US" smtClean="0"/>
+              <a:pPr/>
+              <a:t>12</a:t>
+            </a:fld>
+            <a:endParaRPr lang="en-US"/>
+          </a:p>
+        </p:txBody>
+      </p:sp>
+    </p:spTree>
+    <p:extLst>
+      <p:ext uri="{BB962C8B-B14F-4D97-AF65-F5344CB8AC3E}">
+        <p14:creationId xmlns:p14="http://schemas.microsoft.com/office/powerpoint/2010/main" val="3772578687"/>
+      </p:ext>
+    </p:extLst>
+  </p:cSld>
+  <p:clrMapOvr>
+    <a:masterClrMapping/>
+  </p:clrMapOvr>
+</p:sld>
+</file>
+
+<file path=ppt/slides/slide13.xml><?xml version="1.0" encoding="utf-8"?>
+<p:sld xmlns:a="http://schemas.openxmlformats.org/drawingml/2006/main" xmlns:r="http://schemas.openxmlformats.org/officeDocument/2006/relationships" xmlns:p="http://schemas.openxmlformats.org/presentationml/2006/main">
+  <p:cSld>
+    <p:spTree>
+      <p:nvGrpSpPr>
+        <p:cNvPr id="1" name=""/>
+        <p:cNvGrpSpPr/>
+        <p:nvPr/>
+      </p:nvGrpSpPr>
+      <p:grpSpPr>
+        <a:xfrm>
+          <a:off x="0" y="0"/>
+          <a:ext cx="0" cy="0"/>
+          <a:chOff x="0" y="0"/>
+          <a:chExt cx="0" cy="0"/>
+        </a:xfrm>
+      </p:grpSpPr>
+      <p:sp>
+        <p:nvSpPr>
+          <p:cNvPr id="2" name="Title 1">
+            <a:extLst>
+              <a:ext uri="{FF2B5EF4-FFF2-40B4-BE49-F238E27FC236}">
+                <a16:creationId xmlns:a16="http://schemas.microsoft.com/office/drawing/2014/main" id="{AD7EEC9D-FB73-4C08-E398-5E4F292ECD2E}"/>
+              </a:ext>
+            </a:extLst>
+          </p:cNvPr>
+          <p:cNvSpPr>
+            <a:spLocks noGrp="1"/>
+          </p:cNvSpPr>
+          <p:nvPr>
+            <p:ph type="title"/>
+          </p:nvPr>
+        </p:nvSpPr>
+        <p:spPr/>
+        <p:txBody>
+          <a:bodyPr/>
+          <a:lstStyle/>
+          <a:p>
+            <a:r>
+              <a:rPr lang="en-US" dirty="0"/>
+              <a:t>Like Telescopes</a:t>
+            </a:r>
+          </a:p>
+        </p:txBody>
+      </p:sp>
+      <p:pic>
+        <p:nvPicPr>
+          <p:cNvPr id="6" name="Content Placeholder 5" descr="A large telescope under construction&#10;&#10;AI-generated content may be incorrect.">
+            <a:extLst>
+              <a:ext uri="{FF2B5EF4-FFF2-40B4-BE49-F238E27FC236}">
+                <a16:creationId xmlns:a16="http://schemas.microsoft.com/office/drawing/2014/main" id="{140ABB28-C06A-B0B7-1F5C-6DA83085552B}"/>
+              </a:ext>
+            </a:extLst>
+          </p:cNvPr>
+          <p:cNvPicPr>
+            <a:picLocks noGrp="1" noChangeAspect="1"/>
+          </p:cNvPicPr>
+          <p:nvPr>
+            <p:ph idx="1"/>
+          </p:nvPr>
+        </p:nvPicPr>
+        <p:blipFill>
+          <a:blip r:embed="rId2"/>
+          <a:stretch>
+            <a:fillRect/>
+          </a:stretch>
+        </p:blipFill>
+        <p:spPr>
+          <a:xfrm>
+            <a:off x="1850571" y="1400967"/>
+            <a:ext cx="8490857" cy="4776107"/>
+          </a:xfrm>
+        </p:spPr>
+      </p:pic>
+      <p:sp>
+        <p:nvSpPr>
+          <p:cNvPr id="4" name="Slide Number Placeholder 3">
+            <a:extLst>
+              <a:ext uri="{FF2B5EF4-FFF2-40B4-BE49-F238E27FC236}">
+                <a16:creationId xmlns:a16="http://schemas.microsoft.com/office/drawing/2014/main" id="{80F8EB66-E99A-340F-1386-60E09385B00E}"/>
+              </a:ext>
+            </a:extLst>
+          </p:cNvPr>
+          <p:cNvSpPr>
+            <a:spLocks noGrp="1"/>
+          </p:cNvSpPr>
+          <p:nvPr>
+            <p:ph type="sldNum" sz="quarter" idx="4"/>
+          </p:nvPr>
+        </p:nvSpPr>
+        <p:spPr/>
+        <p:txBody>
+          <a:bodyPr/>
+          <a:lstStyle/>
+          <a:p>
+            <a:fld id="{FA19DD11-D068-0E4A-8D95-134F79C17C0A}" type="slidenum">
+              <a:rPr lang="en-US" smtClean="0"/>
+              <a:pPr/>
+              <a:t>13</a:t>
+            </a:fld>
+            <a:endParaRPr lang="en-US"/>
+          </a:p>
+        </p:txBody>
+      </p:sp>
+    </p:spTree>
+    <p:extLst>
+      <p:ext uri="{BB962C8B-B14F-4D97-AF65-F5344CB8AC3E}">
+        <p14:creationId xmlns:p14="http://schemas.microsoft.com/office/powerpoint/2010/main" val="4169119373"/>
+      </p:ext>
+    </p:extLst>
+  </p:cSld>
+  <p:clrMapOvr>
+    <a:masterClrMapping/>
+  </p:clrMapOvr>
+</p:sld>
+</file>
+
+<file path=ppt/slides/slide14.xml><?xml version="1.0" encoding="utf-8"?>
+<p:sld xmlns:a="http://schemas.openxmlformats.org/drawingml/2006/main" xmlns:r="http://schemas.openxmlformats.org/officeDocument/2006/relationships" xmlns:p="http://schemas.openxmlformats.org/presentationml/2006/main">
+  <p:cSld>
+    <p:spTree>
+      <p:nvGrpSpPr>
+        <p:cNvPr id="1" name=""/>
+        <p:cNvGrpSpPr/>
+        <p:nvPr/>
+      </p:nvGrpSpPr>
+      <p:grpSpPr>
+        <a:xfrm>
+          <a:off x="0" y="0"/>
+          <a:ext cx="0" cy="0"/>
+          <a:chOff x="0" y="0"/>
+          <a:chExt cx="0" cy="0"/>
+        </a:xfrm>
+      </p:grpSpPr>
+      <p:pic>
+        <p:nvPicPr>
+          <p:cNvPr id="7" name="Content Placeholder 5" descr="A large telescope under construction&#10;&#10;AI-generated content may be incorrect.">
+            <a:extLst>
+              <a:ext uri="{FF2B5EF4-FFF2-40B4-BE49-F238E27FC236}">
+                <a16:creationId xmlns:a16="http://schemas.microsoft.com/office/drawing/2014/main" id="{52362143-28BF-5CC4-E1F5-A3B25AAA49C3}"/>
+              </a:ext>
+            </a:extLst>
+          </p:cNvPr>
+          <p:cNvPicPr>
+            <a:picLocks noChangeAspect="1"/>
+          </p:cNvPicPr>
+          <p:nvPr/>
+        </p:nvPicPr>
+        <p:blipFill>
+          <a:blip r:embed="rId2"/>
+          <a:stretch>
+            <a:fillRect/>
+          </a:stretch>
+        </p:blipFill>
+        <p:spPr>
+          <a:xfrm>
+            <a:off x="1850571" y="1400967"/>
+            <a:ext cx="8490857" cy="4776107"/>
+          </a:xfrm>
+          <a:prstGeom prst="rect">
+            <a:avLst/>
+          </a:prstGeom>
+        </p:spPr>
+      </p:pic>
+      <p:sp>
+        <p:nvSpPr>
+          <p:cNvPr id="2" name="Title 1">
+            <a:extLst>
+              <a:ext uri="{FF2B5EF4-FFF2-40B4-BE49-F238E27FC236}">
+                <a16:creationId xmlns:a16="http://schemas.microsoft.com/office/drawing/2014/main" id="{05E5B17B-084E-E296-0F7B-3244327A04CE}"/>
+              </a:ext>
+            </a:extLst>
+          </p:cNvPr>
+          <p:cNvSpPr>
+            <a:spLocks noGrp="1"/>
+          </p:cNvSpPr>
+          <p:nvPr>
+            <p:ph type="title"/>
+          </p:nvPr>
+        </p:nvSpPr>
+        <p:spPr/>
+        <p:txBody>
+          <a:bodyPr/>
+          <a:lstStyle/>
+          <a:p>
+            <a:r>
+              <a:rPr lang="en-US" dirty="0"/>
+              <a:t>Like Dams</a:t>
+            </a:r>
+          </a:p>
+        </p:txBody>
+      </p:sp>
+      <p:pic>
+        <p:nvPicPr>
+          <p:cNvPr id="6" name="Content Placeholder 5" descr="A water flowing from a dam&#10;&#10;AI-generated content may be incorrect.">
+            <a:extLst>
+              <a:ext uri="{FF2B5EF4-FFF2-40B4-BE49-F238E27FC236}">
+                <a16:creationId xmlns:a16="http://schemas.microsoft.com/office/drawing/2014/main" id="{D3C9C34C-8EC6-9E9C-C051-F554868594D1}"/>
+              </a:ext>
+            </a:extLst>
+          </p:cNvPr>
+          <p:cNvPicPr>
+            <a:picLocks noGrp="1" noChangeAspect="1"/>
+          </p:cNvPicPr>
+          <p:nvPr>
+            <p:ph idx="1"/>
+          </p:nvPr>
+        </p:nvPicPr>
+        <p:blipFill>
+          <a:blip r:embed="rId3"/>
+          <a:srcRect t="15492"/>
+          <a:stretch>
+            <a:fillRect/>
+          </a:stretch>
+        </p:blipFill>
+        <p:spPr>
+          <a:xfrm>
+            <a:off x="1850571" y="1400967"/>
+            <a:ext cx="8490858" cy="4776107"/>
+          </a:xfrm>
+        </p:spPr>
+      </p:pic>
+      <p:sp>
+        <p:nvSpPr>
+          <p:cNvPr id="4" name="Slide Number Placeholder 3">
+            <a:extLst>
+              <a:ext uri="{FF2B5EF4-FFF2-40B4-BE49-F238E27FC236}">
+                <a16:creationId xmlns:a16="http://schemas.microsoft.com/office/drawing/2014/main" id="{55C8542F-DAB3-2790-825E-F22F895131BC}"/>
+              </a:ext>
+            </a:extLst>
+          </p:cNvPr>
+          <p:cNvSpPr>
+            <a:spLocks noGrp="1"/>
+          </p:cNvSpPr>
+          <p:nvPr>
+            <p:ph type="sldNum" sz="quarter" idx="4"/>
+          </p:nvPr>
+        </p:nvSpPr>
+        <p:spPr/>
+        <p:txBody>
+          <a:bodyPr/>
+          <a:lstStyle/>
+          <a:p>
+            <a:fld id="{FA19DD11-D068-0E4A-8D95-134F79C17C0A}" type="slidenum">
+              <a:rPr lang="en-US" smtClean="0"/>
+              <a:pPr/>
+              <a:t>14</a:t>
+            </a:fld>
+            <a:endParaRPr lang="en-US"/>
+          </a:p>
+        </p:txBody>
+      </p:sp>
+    </p:spTree>
+    <p:extLst>
+      <p:ext uri="{BB962C8B-B14F-4D97-AF65-F5344CB8AC3E}">
+        <p14:creationId xmlns:p14="http://schemas.microsoft.com/office/powerpoint/2010/main" val="3219970965"/>
+      </p:ext>
+    </p:extLst>
+  </p:cSld>
+  <p:clrMapOvr>
+    <a:masterClrMapping/>
+  </p:clrMapOvr>
+</p:sld>
+</file>
+
+<file path=ppt/slides/slide15.xml><?xml version="1.0" encoding="utf-8"?>
+<p:sld xmlns:a="http://schemas.openxmlformats.org/drawingml/2006/main" xmlns:r="http://schemas.openxmlformats.org/officeDocument/2006/relationships" xmlns:p="http://schemas.openxmlformats.org/presentationml/2006/main">
+  <p:cSld>
+    <p:spTree>
+      <p:nvGrpSpPr>
+        <p:cNvPr id="1" name=""/>
+        <p:cNvGrpSpPr/>
+        <p:nvPr/>
+      </p:nvGrpSpPr>
+      <p:grpSpPr>
+        <a:xfrm>
+          <a:off x="0" y="0"/>
+          <a:ext cx="0" cy="0"/>
+          <a:chOff x="0" y="0"/>
+          <a:chExt cx="0" cy="0"/>
+        </a:xfrm>
+      </p:grpSpPr>
+      <p:sp>
+        <p:nvSpPr>
+          <p:cNvPr id="2" name="Title 1">
+            <a:extLst>
+              <a:ext uri="{FF2B5EF4-FFF2-40B4-BE49-F238E27FC236}">
+                <a16:creationId xmlns:a16="http://schemas.microsoft.com/office/drawing/2014/main" id="{603E40AC-3677-3E09-D3C8-17EF2A297E01}"/>
+              </a:ext>
+            </a:extLst>
+          </p:cNvPr>
+          <p:cNvSpPr>
+            <a:spLocks noGrp="1"/>
+          </p:cNvSpPr>
+          <p:nvPr>
+            <p:ph type="title"/>
+          </p:nvPr>
+        </p:nvSpPr>
+        <p:spPr/>
+        <p:txBody>
+          <a:bodyPr/>
+          <a:lstStyle/>
+          <a:p>
+            <a:r>
+              <a:rPr lang="en-US" dirty="0"/>
+              <a:t>Like Generators</a:t>
+            </a:r>
+          </a:p>
+        </p:txBody>
+      </p:sp>
+      <p:sp>
+        <p:nvSpPr>
+          <p:cNvPr id="3" name="Content Placeholder 2">
+            <a:extLst>
+              <a:ext uri="{FF2B5EF4-FFF2-40B4-BE49-F238E27FC236}">
+                <a16:creationId xmlns:a16="http://schemas.microsoft.com/office/drawing/2014/main" id="{E73E640D-7A87-2052-BE05-5DC0EF6D0714}"/>
+              </a:ext>
+            </a:extLst>
+          </p:cNvPr>
+          <p:cNvSpPr>
+            <a:spLocks noGrp="1"/>
+          </p:cNvSpPr>
+          <p:nvPr>
+            <p:ph idx="1"/>
+          </p:nvPr>
+        </p:nvSpPr>
+        <p:spPr/>
+        <p:txBody>
+          <a:bodyPr/>
+          <a:lstStyle/>
+          <a:p>
+            <a:r>
+              <a:rPr lang="en-US" dirty="0"/>
+              <a:t>&lt;INSERT PHOTO OF SEXY POWERPOD&gt;</a:t>
+            </a:r>
+          </a:p>
+        </p:txBody>
+      </p:sp>
+      <p:sp>
+        <p:nvSpPr>
+          <p:cNvPr id="4" name="Slide Number Placeholder 3">
+            <a:extLst>
+              <a:ext uri="{FF2B5EF4-FFF2-40B4-BE49-F238E27FC236}">
+                <a16:creationId xmlns:a16="http://schemas.microsoft.com/office/drawing/2014/main" id="{25484473-01C8-83B1-5B01-D43CF9C926CA}"/>
+              </a:ext>
+            </a:extLst>
+          </p:cNvPr>
+          <p:cNvSpPr>
+            <a:spLocks noGrp="1"/>
+          </p:cNvSpPr>
+          <p:nvPr>
+            <p:ph type="sldNum" sz="quarter" idx="4"/>
+          </p:nvPr>
+        </p:nvSpPr>
+        <p:spPr/>
+        <p:txBody>
+          <a:bodyPr/>
+          <a:lstStyle/>
+          <a:p>
+            <a:fld id="{FA19DD11-D068-0E4A-8D95-134F79C17C0A}" type="slidenum">
+              <a:rPr lang="en-US" smtClean="0"/>
+              <a:pPr/>
+              <a:t>15</a:t>
+            </a:fld>
+            <a:endParaRPr lang="en-US"/>
+          </a:p>
+        </p:txBody>
+      </p:sp>
+    </p:spTree>
+    <p:extLst>
+      <p:ext uri="{BB962C8B-B14F-4D97-AF65-F5344CB8AC3E}">
+        <p14:creationId xmlns:p14="http://schemas.microsoft.com/office/powerpoint/2010/main" val="3354758249"/>
+      </p:ext>
+    </p:extLst>
+  </p:cSld>
+  <p:clrMapOvr>
+    <a:masterClrMapping/>
+  </p:clrMapOvr>
+</p:sld>
+</file>
+
+<file path=ppt/slides/slide16.xml><?xml version="1.0" encoding="utf-8"?>
+<p:sld xmlns:a="http://schemas.openxmlformats.org/drawingml/2006/main" xmlns:r="http://schemas.openxmlformats.org/officeDocument/2006/relationships" xmlns:p="http://schemas.openxmlformats.org/presentationml/2006/main">
+  <p:cSld>
+    <p:spTree>
+      <p:nvGrpSpPr>
+        <p:cNvPr id="1" name=""/>
+        <p:cNvGrpSpPr/>
+        <p:nvPr/>
+      </p:nvGrpSpPr>
+      <p:grpSpPr>
+        <a:xfrm>
+          <a:off x="0" y="0"/>
+          <a:ext cx="0" cy="0"/>
+          <a:chOff x="0" y="0"/>
+          <a:chExt cx="0" cy="0"/>
+        </a:xfrm>
+      </p:grpSpPr>
+      <p:sp>
+        <p:nvSpPr>
+          <p:cNvPr id="2" name="Title 1">
+            <a:extLst>
+              <a:ext uri="{FF2B5EF4-FFF2-40B4-BE49-F238E27FC236}">
+                <a16:creationId xmlns:a16="http://schemas.microsoft.com/office/drawing/2014/main" id="{1EBF43B7-06B6-CFA0-8B6F-96BEA50E5C5F}"/>
+              </a:ext>
+            </a:extLst>
+          </p:cNvPr>
+          <p:cNvSpPr>
+            <a:spLocks noGrp="1"/>
+          </p:cNvSpPr>
+          <p:nvPr>
+            <p:ph type="title"/>
+          </p:nvPr>
+        </p:nvSpPr>
+        <p:spPr/>
+        <p:txBody>
+          <a:bodyPr/>
+          <a:lstStyle/>
+          <a:p>
+            <a:r>
+              <a:rPr lang="en-US" dirty="0"/>
+              <a:t>Hardware Vendors</a:t>
+            </a:r>
+          </a:p>
+        </p:txBody>
+      </p:sp>
+      <p:sp>
+        <p:nvSpPr>
+          <p:cNvPr id="3" name="Content Placeholder 2">
+            <a:extLst>
+              <a:ext uri="{FF2B5EF4-FFF2-40B4-BE49-F238E27FC236}">
+                <a16:creationId xmlns:a16="http://schemas.microsoft.com/office/drawing/2014/main" id="{57F25188-4C42-9EBD-0242-732A9B057EB5}"/>
+              </a:ext>
+            </a:extLst>
+          </p:cNvPr>
+          <p:cNvSpPr>
+            <a:spLocks noGrp="1"/>
+          </p:cNvSpPr>
+          <p:nvPr>
+            <p:ph idx="1"/>
+          </p:nvPr>
+        </p:nvSpPr>
+        <p:spPr/>
+        <p:txBody>
+          <a:bodyPr/>
+          <a:lstStyle/>
+          <a:p>
+            <a:r>
+              <a:rPr lang="en-US" dirty="0"/>
+              <a:t>(Logos of many different kinds of vendors)</a:t>
+            </a:r>
+          </a:p>
+        </p:txBody>
+      </p:sp>
+      <p:sp>
+        <p:nvSpPr>
+          <p:cNvPr id="4" name="Slide Number Placeholder 3">
+            <a:extLst>
+              <a:ext uri="{FF2B5EF4-FFF2-40B4-BE49-F238E27FC236}">
+                <a16:creationId xmlns:a16="http://schemas.microsoft.com/office/drawing/2014/main" id="{E55E9565-3356-C358-1644-59F3B22B097D}"/>
+              </a:ext>
+            </a:extLst>
+          </p:cNvPr>
+          <p:cNvSpPr>
+            <a:spLocks noGrp="1"/>
+          </p:cNvSpPr>
+          <p:nvPr>
+            <p:ph type="sldNum" sz="quarter" idx="4"/>
+          </p:nvPr>
+        </p:nvSpPr>
+        <p:spPr/>
+        <p:txBody>
+          <a:bodyPr/>
+          <a:lstStyle/>
+          <a:p>
+            <a:fld id="{FA19DD11-D068-0E4A-8D95-134F79C17C0A}" type="slidenum">
+              <a:rPr lang="en-US" smtClean="0"/>
+              <a:pPr/>
+              <a:t>16</a:t>
+            </a:fld>
+            <a:endParaRPr lang="en-US"/>
+          </a:p>
+        </p:txBody>
+      </p:sp>
+      <p:pic>
+        <p:nvPicPr>
+          <p:cNvPr id="6" name="Picture 5" descr="A green logo with a white background&#10;&#10;AI-generated content may be incorrect.">
+            <a:extLst>
+              <a:ext uri="{FF2B5EF4-FFF2-40B4-BE49-F238E27FC236}">
+                <a16:creationId xmlns:a16="http://schemas.microsoft.com/office/drawing/2014/main" id="{60965F02-6300-3EA2-0B1B-E56D2CDCC437}"/>
+              </a:ext>
+            </a:extLst>
+          </p:cNvPr>
+          <p:cNvPicPr>
+            <a:picLocks noChangeAspect="1"/>
+          </p:cNvPicPr>
+          <p:nvPr/>
+        </p:nvPicPr>
+        <p:blipFill>
+          <a:blip r:embed="rId2"/>
+          <a:srcRect t="2254"/>
+          <a:stretch>
+            <a:fillRect/>
+          </a:stretch>
+        </p:blipFill>
+        <p:spPr>
+          <a:xfrm>
+            <a:off x="1118507" y="2432957"/>
+            <a:ext cx="4431517" cy="1298122"/>
+          </a:xfrm>
+          <a:prstGeom prst="rect">
+            <a:avLst/>
+          </a:prstGeom>
+        </p:spPr>
+      </p:pic>
+    </p:spTree>
+    <p:extLst>
+      <p:ext uri="{BB962C8B-B14F-4D97-AF65-F5344CB8AC3E}">
+        <p14:creationId xmlns:p14="http://schemas.microsoft.com/office/powerpoint/2010/main" val="973751848"/>
+      </p:ext>
+    </p:extLst>
+  </p:cSld>
+  <p:clrMapOvr>
+    <a:masterClrMapping/>
+  </p:clrMapOvr>
+</p:sld>
+</file>
+
+<file path=ppt/slides/slide17.xml><?xml version="1.0" encoding="utf-8"?>
+<p:sld xmlns:a="http://schemas.openxmlformats.org/drawingml/2006/main" xmlns:r="http://schemas.openxmlformats.org/officeDocument/2006/relationships" xmlns:p="http://schemas.openxmlformats.org/presentationml/2006/main">
+  <p:cSld>
+    <p:spTree>
+      <p:nvGrpSpPr>
+        <p:cNvPr id="1" name=""/>
+        <p:cNvGrpSpPr/>
+        <p:nvPr/>
+      </p:nvGrpSpPr>
+      <p:grpSpPr>
+        <a:xfrm>
+          <a:off x="0" y="0"/>
+          <a:ext cx="0" cy="0"/>
+          <a:chOff x="0" y="0"/>
+          <a:chExt cx="0" cy="0"/>
+        </a:xfrm>
+      </p:grpSpPr>
+      <p:sp>
+        <p:nvSpPr>
+          <p:cNvPr id="2" name="Title 1">
+            <a:extLst>
+              <a:ext uri="{FF2B5EF4-FFF2-40B4-BE49-F238E27FC236}">
+                <a16:creationId xmlns:a16="http://schemas.microsoft.com/office/drawing/2014/main" id="{4E549B09-9524-9E64-32EE-4FB8D4D83449}"/>
+              </a:ext>
+            </a:extLst>
+          </p:cNvPr>
+          <p:cNvSpPr>
+            <a:spLocks noGrp="1"/>
+          </p:cNvSpPr>
+          <p:nvPr>
+            <p:ph type="title"/>
+          </p:nvPr>
+        </p:nvSpPr>
+        <p:spPr/>
+        <p:txBody>
+          <a:bodyPr/>
+          <a:lstStyle/>
+          <a:p>
+            <a:r>
+              <a:rPr lang="en-US" dirty="0"/>
+              <a:t>Care to Share (Your source)?</a:t>
+            </a:r>
+          </a:p>
+        </p:txBody>
+      </p:sp>
+      <p:sp>
+        <p:nvSpPr>
+          <p:cNvPr id="3" name="Content Placeholder 2">
+            <a:extLst>
+              <a:ext uri="{FF2B5EF4-FFF2-40B4-BE49-F238E27FC236}">
+                <a16:creationId xmlns:a16="http://schemas.microsoft.com/office/drawing/2014/main" id="{9D93156D-8E3B-61A9-63F0-E1870BEA1A09}"/>
+              </a:ext>
+            </a:extLst>
+          </p:cNvPr>
+          <p:cNvSpPr>
+            <a:spLocks noGrp="1"/>
+          </p:cNvSpPr>
+          <p:nvPr>
+            <p:ph idx="1"/>
+          </p:nvPr>
+        </p:nvSpPr>
+        <p:spPr/>
+        <p:txBody>
+          <a:bodyPr/>
+          <a:lstStyle/>
+          <a:p>
+            <a:r>
+              <a:rPr lang="en-US" dirty="0"/>
+              <a:t>No.</a:t>
+            </a:r>
+          </a:p>
+          <a:p>
+            <a:r>
+              <a:rPr lang="en-US" dirty="0"/>
+              <a:t>Closed off.</a:t>
+            </a:r>
+          </a:p>
+          <a:p>
+            <a:r>
+              <a:rPr lang="en-US" dirty="0"/>
+              <a:t>Fragmented Community</a:t>
+            </a:r>
+          </a:p>
+          <a:p>
+            <a:r>
+              <a:rPr lang="en-US" dirty="0"/>
+              <a:t>Stuck in their own ways. </a:t>
+            </a:r>
+          </a:p>
+        </p:txBody>
+      </p:sp>
+      <p:sp>
+        <p:nvSpPr>
+          <p:cNvPr id="4" name="Slide Number Placeholder 3">
+            <a:extLst>
+              <a:ext uri="{FF2B5EF4-FFF2-40B4-BE49-F238E27FC236}">
+                <a16:creationId xmlns:a16="http://schemas.microsoft.com/office/drawing/2014/main" id="{A295DC32-A432-F9DC-AE4D-C10D09C55DCE}"/>
+              </a:ext>
+            </a:extLst>
+          </p:cNvPr>
+          <p:cNvSpPr>
+            <a:spLocks noGrp="1"/>
+          </p:cNvSpPr>
+          <p:nvPr>
+            <p:ph type="sldNum" sz="quarter" idx="4"/>
+          </p:nvPr>
+        </p:nvSpPr>
+        <p:spPr/>
+        <p:txBody>
+          <a:bodyPr/>
+          <a:lstStyle/>
+          <a:p>
+            <a:fld id="{FA19DD11-D068-0E4A-8D95-134F79C17C0A}" type="slidenum">
+              <a:rPr lang="en-US" smtClean="0"/>
+              <a:pPr/>
+              <a:t>17</a:t>
+            </a:fld>
+            <a:endParaRPr lang="en-US"/>
+          </a:p>
+        </p:txBody>
+      </p:sp>
+    </p:spTree>
+    <p:extLst>
+      <p:ext uri="{BB962C8B-B14F-4D97-AF65-F5344CB8AC3E}">
+        <p14:creationId xmlns:p14="http://schemas.microsoft.com/office/powerpoint/2010/main" val="3160750205"/>
+      </p:ext>
+    </p:extLst>
+  </p:cSld>
+  <p:clrMapOvr>
+    <a:masterClrMapping/>
+  </p:clrMapOvr>
+</p:sld>
+</file>
+
+<file path=ppt/slides/slide18.xml><?xml version="1.0" encoding="utf-8"?>
+<p:sld xmlns:a="http://schemas.openxmlformats.org/drawingml/2006/main" xmlns:r="http://schemas.openxmlformats.org/officeDocument/2006/relationships" xmlns:p="http://schemas.openxmlformats.org/presentationml/2006/main">
+  <p:cSld>
+    <p:spTree>
+      <p:nvGrpSpPr>
+        <p:cNvPr id="1" name=""/>
+        <p:cNvGrpSpPr/>
+        <p:nvPr/>
+      </p:nvGrpSpPr>
+      <p:grpSpPr>
+        <a:xfrm>
+          <a:off x="0" y="0"/>
+          <a:ext cx="0" cy="0"/>
+          <a:chOff x="0" y="0"/>
+          <a:chExt cx="0" cy="0"/>
+        </a:xfrm>
+      </p:grpSpPr>
+      <p:sp>
+        <p:nvSpPr>
+          <p:cNvPr id="2" name="Title 1">
+            <a:extLst>
+              <a:ext uri="{FF2B5EF4-FFF2-40B4-BE49-F238E27FC236}">
+                <a16:creationId xmlns:a16="http://schemas.microsoft.com/office/drawing/2014/main" id="{A7600ED0-F4ED-E0FC-D0EC-D8BA882792C9}"/>
+              </a:ext>
+            </a:extLst>
+          </p:cNvPr>
+          <p:cNvSpPr>
+            <a:spLocks noGrp="1"/>
+          </p:cNvSpPr>
+          <p:nvPr>
+            <p:ph type="title"/>
+          </p:nvPr>
+        </p:nvSpPr>
+        <p:spPr/>
+        <p:txBody>
+          <a:bodyPr/>
+          <a:lstStyle/>
+          <a:p>
+            <a:r>
+              <a:rPr lang="en-US" dirty="0"/>
+              <a:t>Conventions</a:t>
+            </a:r>
+          </a:p>
+        </p:txBody>
+      </p:sp>
+      <p:sp>
+        <p:nvSpPr>
+          <p:cNvPr id="3" name="Content Placeholder 2">
+            <a:extLst>
+              <a:ext uri="{FF2B5EF4-FFF2-40B4-BE49-F238E27FC236}">
+                <a16:creationId xmlns:a16="http://schemas.microsoft.com/office/drawing/2014/main" id="{F749B1D7-806D-FD21-BA98-28D4A23F4AAD}"/>
+              </a:ext>
+            </a:extLst>
+          </p:cNvPr>
+          <p:cNvSpPr>
+            <a:spLocks noGrp="1"/>
+          </p:cNvSpPr>
+          <p:nvPr>
+            <p:ph idx="1"/>
+          </p:nvPr>
+        </p:nvSpPr>
+        <p:spPr/>
+        <p:txBody>
+          <a:bodyPr/>
+          <a:lstStyle/>
+          <a:p>
+            <a:r>
+              <a:rPr lang="en-US" dirty="0"/>
+              <a:t>…are convenient</a:t>
+            </a:r>
+          </a:p>
+          <a:p>
+            <a:r>
+              <a:rPr lang="en-US" dirty="0"/>
+              <a:t>…are restrictive</a:t>
+            </a:r>
+          </a:p>
+          <a:p>
+            <a:r>
+              <a:rPr lang="en-US" dirty="0"/>
+              <a:t>…enforce a norm (dictated by industry)</a:t>
+            </a:r>
+          </a:p>
+        </p:txBody>
+      </p:sp>
+      <p:sp>
+        <p:nvSpPr>
+          <p:cNvPr id="4" name="Slide Number Placeholder 3">
+            <a:extLst>
+              <a:ext uri="{FF2B5EF4-FFF2-40B4-BE49-F238E27FC236}">
+                <a16:creationId xmlns:a16="http://schemas.microsoft.com/office/drawing/2014/main" id="{7DDA253B-B320-8CC7-801E-22F9B0A80530}"/>
+              </a:ext>
+            </a:extLst>
+          </p:cNvPr>
+          <p:cNvSpPr>
+            <a:spLocks noGrp="1"/>
+          </p:cNvSpPr>
+          <p:nvPr>
+            <p:ph type="sldNum" sz="quarter" idx="4"/>
+          </p:nvPr>
+        </p:nvSpPr>
+        <p:spPr/>
+        <p:txBody>
+          <a:bodyPr/>
+          <a:lstStyle/>
+          <a:p>
+            <a:fld id="{FA19DD11-D068-0E4A-8D95-134F79C17C0A}" type="slidenum">
+              <a:rPr lang="en-US" smtClean="0"/>
+              <a:pPr/>
+              <a:t>18</a:t>
+            </a:fld>
+            <a:endParaRPr lang="en-US"/>
+          </a:p>
+        </p:txBody>
+      </p:sp>
+    </p:spTree>
+    <p:extLst>
+      <p:ext uri="{BB962C8B-B14F-4D97-AF65-F5344CB8AC3E}">
+        <p14:creationId xmlns:p14="http://schemas.microsoft.com/office/powerpoint/2010/main" val="2539937542"/>
+      </p:ext>
+    </p:extLst>
+  </p:cSld>
+  <p:clrMapOvr>
+    <a:masterClrMapping/>
+  </p:clrMapOvr>
+</p:sld>
+</file>
+
+<file path=ppt/slides/slide19.xml><?xml version="1.0" encoding="utf-8"?>
+<p:sld xmlns:a="http://schemas.openxmlformats.org/drawingml/2006/main" xmlns:r="http://schemas.openxmlformats.org/officeDocument/2006/relationships" xmlns:p="http://schemas.openxmlformats.org/presentationml/2006/main">
+  <p:cSld>
+    <p:spTree>
+      <p:nvGrpSpPr>
+        <p:cNvPr id="1" name=""/>
+        <p:cNvGrpSpPr/>
+        <p:nvPr/>
+      </p:nvGrpSpPr>
+      <p:grpSpPr>
+        <a:xfrm>
+          <a:off x="0" y="0"/>
+          <a:ext cx="0" cy="0"/>
+          <a:chOff x="0" y="0"/>
+          <a:chExt cx="0" cy="0"/>
+        </a:xfrm>
+      </p:grpSpPr>
+      <p:sp>
+        <p:nvSpPr>
+          <p:cNvPr id="2" name="Title 1">
+            <a:extLst>
+              <a:ext uri="{FF2B5EF4-FFF2-40B4-BE49-F238E27FC236}">
+                <a16:creationId xmlns:a16="http://schemas.microsoft.com/office/drawing/2014/main" id="{E49FA3EE-E5BD-6ABE-EC3C-F53E8847ACAB}"/>
+              </a:ext>
+            </a:extLst>
+          </p:cNvPr>
+          <p:cNvSpPr>
+            <a:spLocks noGrp="1"/>
+          </p:cNvSpPr>
+          <p:nvPr>
+            <p:ph type="title"/>
+          </p:nvPr>
+        </p:nvSpPr>
+        <p:spPr/>
+        <p:txBody>
+          <a:bodyPr/>
+          <a:lstStyle/>
+          <a:p>
+            <a:r>
+              <a:rPr lang="en-US" dirty="0"/>
+              <a:t>Disclaimer</a:t>
+            </a:r>
+          </a:p>
+        </p:txBody>
+      </p:sp>
+      <p:sp>
+        <p:nvSpPr>
+          <p:cNvPr id="3" name="Content Placeholder 2">
+            <a:extLst>
+              <a:ext uri="{FF2B5EF4-FFF2-40B4-BE49-F238E27FC236}">
+                <a16:creationId xmlns:a16="http://schemas.microsoft.com/office/drawing/2014/main" id="{994F2DBD-A45C-2B4A-5DF2-1098E67732D4}"/>
+              </a:ext>
+            </a:extLst>
+          </p:cNvPr>
+          <p:cNvSpPr>
+            <a:spLocks noGrp="1"/>
+          </p:cNvSpPr>
+          <p:nvPr>
+            <p:ph idx="1"/>
+          </p:nvPr>
+        </p:nvSpPr>
+        <p:spPr/>
+        <p:txBody>
+          <a:bodyPr/>
+          <a:lstStyle/>
+          <a:p>
+            <a:r>
+              <a:rPr lang="en-US" dirty="0"/>
+              <a:t>I &lt;3 our vendors.</a:t>
+            </a:r>
+          </a:p>
+          <a:p>
+            <a:r>
+              <a:rPr lang="en-US" dirty="0"/>
+              <a:t>This practice is pervasive.</a:t>
+            </a:r>
+          </a:p>
+        </p:txBody>
+      </p:sp>
+      <p:sp>
+        <p:nvSpPr>
+          <p:cNvPr id="4" name="Slide Number Placeholder 3">
+            <a:extLst>
+              <a:ext uri="{FF2B5EF4-FFF2-40B4-BE49-F238E27FC236}">
+                <a16:creationId xmlns:a16="http://schemas.microsoft.com/office/drawing/2014/main" id="{D019640E-9DAA-2C87-51A2-9344D0863C93}"/>
+              </a:ext>
+            </a:extLst>
+          </p:cNvPr>
+          <p:cNvSpPr>
+            <a:spLocks noGrp="1"/>
+          </p:cNvSpPr>
+          <p:nvPr>
+            <p:ph type="sldNum" sz="quarter" idx="4"/>
+          </p:nvPr>
+        </p:nvSpPr>
+        <p:spPr/>
+        <p:txBody>
+          <a:bodyPr/>
+          <a:lstStyle/>
+          <a:p>
+            <a:fld id="{FA19DD11-D068-0E4A-8D95-134F79C17C0A}" type="slidenum">
+              <a:rPr lang="en-US" smtClean="0"/>
+              <a:pPr/>
+              <a:t>19</a:t>
+            </a:fld>
+            <a:endParaRPr lang="en-US"/>
+          </a:p>
+        </p:txBody>
+      </p:sp>
+    </p:spTree>
+    <p:extLst>
+      <p:ext uri="{BB962C8B-B14F-4D97-AF65-F5344CB8AC3E}">
+        <p14:creationId xmlns:p14="http://schemas.microsoft.com/office/powerpoint/2010/main" val="564978346"/>
+      </p:ext>
+    </p:extLst>
+  </p:cSld>
+  <p:clrMapOvr>
+    <a:masterClrMapping/>
+  </p:clrMapOvr>
+</p:sld>
+</file>
+
+<file path=ppt/slides/slide2.xml><?xml version="1.0" encoding="utf-8"?>
+<p:sld xmlns:a="http://schemas.openxmlformats.org/drawingml/2006/main" xmlns:r="http://schemas.openxmlformats.org/officeDocument/2006/relationships" xmlns:p="http://schemas.openxmlformats.org/presentationml/2006/main">
+  <p:cSld>
+    <p:spTree>
+      <p:nvGrpSpPr>
+        <p:cNvPr id="1" name=""/>
+        <p:cNvGrpSpPr/>
+        <p:nvPr/>
+      </p:nvGrpSpPr>
+      <p:grpSpPr>
+        <a:xfrm>
+          <a:off x="0" y="0"/>
+          <a:ext cx="0" cy="0"/>
+          <a:chOff x="0" y="0"/>
+          <a:chExt cx="0" cy="0"/>
+        </a:xfrm>
+      </p:grpSpPr>
+      <p:sp>
+        <p:nvSpPr>
+          <p:cNvPr id="2" name="Title 1">
+            <a:extLst>
+              <a:ext uri="{FF2B5EF4-FFF2-40B4-BE49-F238E27FC236}">
+                <a16:creationId xmlns:a16="http://schemas.microsoft.com/office/drawing/2014/main" id="{63453728-B39E-1CFD-7532-7DADBE8A69A4}"/>
+              </a:ext>
+            </a:extLst>
+          </p:cNvPr>
+          <p:cNvSpPr>
+            <a:spLocks noGrp="1"/>
+          </p:cNvSpPr>
+          <p:nvPr>
+            <p:ph type="title"/>
+          </p:nvPr>
+        </p:nvSpPr>
+        <p:spPr/>
+        <p:txBody>
+          <a:bodyPr/>
+          <a:lstStyle/>
+          <a:p>
+            <a:r>
+              <a:rPr lang="en-US" dirty="0"/>
+              <a:t>&lt;table id=‘table’&gt;Contents&lt;/table&gt;</a:t>
+            </a:r>
+          </a:p>
+        </p:txBody>
+      </p:sp>
+      <p:sp>
+        <p:nvSpPr>
+          <p:cNvPr id="3" name="Content Placeholder 2">
+            <a:extLst>
+              <a:ext uri="{FF2B5EF4-FFF2-40B4-BE49-F238E27FC236}">
+                <a16:creationId xmlns:a16="http://schemas.microsoft.com/office/drawing/2014/main" id="{83BA2695-33E3-89CE-970A-2CA77674FEA6}"/>
+              </a:ext>
+            </a:extLst>
+          </p:cNvPr>
+          <p:cNvSpPr>
+            <a:spLocks noGrp="1"/>
+          </p:cNvSpPr>
+          <p:nvPr>
+            <p:ph idx="1"/>
+          </p:nvPr>
+        </p:nvSpPr>
+        <p:spPr/>
+        <p:txBody>
+          <a:bodyPr>
+            <a:normAutofit fontScale="62500" lnSpcReduction="20000"/>
+          </a:bodyPr>
+          <a:lstStyle/>
+          <a:p>
+            <a:r>
+              <a:rPr lang="en-US" dirty="0"/>
+              <a:t>Who Am I</a:t>
+            </a:r>
+          </a:p>
+          <a:p>
+            <a:r>
+              <a:rPr lang="en-US" dirty="0"/>
+              <a:t>HYENA, and what we do.</a:t>
+            </a:r>
+          </a:p>
+          <a:p>
+            <a:r>
+              <a:rPr lang="en-US" dirty="0"/>
+              <a:t>Hardware Interaction &amp; Industrial Automation</a:t>
+            </a:r>
+          </a:p>
+          <a:p>
+            <a:r>
+              <a:rPr lang="en-US" dirty="0"/>
+              <a:t>Not your normal Hardware (PLC vs PC)</a:t>
+            </a:r>
+          </a:p>
+          <a:p>
+            <a:r>
+              <a:rPr lang="en-US" dirty="0"/>
+              <a:t>Realtime vs </a:t>
+            </a:r>
+            <a:r>
+              <a:rPr lang="en-US" dirty="0" err="1"/>
+              <a:t>REALtime</a:t>
+            </a:r>
+            <a:endParaRPr lang="en-US" dirty="0"/>
+          </a:p>
+          <a:p>
+            <a:r>
+              <a:rPr lang="en-US" dirty="0" err="1"/>
+              <a:t>PreemptRT</a:t>
+            </a:r>
+            <a:endParaRPr lang="en-US" dirty="0"/>
+          </a:p>
+          <a:p>
+            <a:r>
+              <a:rPr lang="en-US" dirty="0"/>
+              <a:t>Why are we using PLCs</a:t>
+            </a:r>
+          </a:p>
+          <a:p>
+            <a:r>
+              <a:rPr lang="en-US" dirty="0"/>
+              <a:t>Disclaimer</a:t>
+            </a:r>
+          </a:p>
+          <a:p>
+            <a:r>
+              <a:rPr lang="en-US" dirty="0"/>
+              <a:t>The good, the bad and the ugly</a:t>
+            </a:r>
+          </a:p>
+          <a:p>
+            <a:r>
+              <a:rPr lang="en-US" dirty="0"/>
+              <a:t>Pay to Play (IO)</a:t>
+            </a:r>
+          </a:p>
+          <a:p>
+            <a:r>
+              <a:rPr lang="en-US" dirty="0"/>
+              <a:t>Pay to Play (Technology)</a:t>
+            </a:r>
+          </a:p>
+          <a:p>
+            <a:r>
+              <a:rPr lang="en-US" dirty="0"/>
+              <a:t>The Community Problem</a:t>
+            </a:r>
+          </a:p>
+          <a:p>
+            <a:r>
+              <a:rPr lang="en-US" dirty="0"/>
+              <a:t>Licenses, Licenses, Licenses.</a:t>
+            </a:r>
+          </a:p>
+          <a:p>
+            <a:endParaRPr lang="en-US" dirty="0"/>
+          </a:p>
+          <a:p>
+            <a:endParaRPr lang="en-US" dirty="0"/>
+          </a:p>
+        </p:txBody>
+      </p:sp>
+      <p:sp>
+        <p:nvSpPr>
+          <p:cNvPr id="4" name="Slide Number Placeholder 3">
+            <a:extLst>
+              <a:ext uri="{FF2B5EF4-FFF2-40B4-BE49-F238E27FC236}">
+                <a16:creationId xmlns:a16="http://schemas.microsoft.com/office/drawing/2014/main" id="{9EAE50FA-D34A-E1D3-9CB5-9E99C902E476}"/>
+              </a:ext>
+            </a:extLst>
+          </p:cNvPr>
+          <p:cNvSpPr>
+            <a:spLocks noGrp="1"/>
+          </p:cNvSpPr>
+          <p:nvPr>
+            <p:ph type="sldNum" sz="quarter" idx="4"/>
+          </p:nvPr>
+        </p:nvSpPr>
+        <p:spPr/>
+        <p:txBody>
+          <a:bodyPr/>
+          <a:lstStyle/>
+          <a:p>
+            <a:fld id="{FA19DD11-D068-0E4A-8D95-134F79C17C0A}" type="slidenum">
+              <a:rPr lang="en-US" smtClean="0"/>
+              <a:pPr/>
+              <a:t>2</a:t>
+            </a:fld>
+            <a:endParaRPr lang="en-US"/>
+          </a:p>
+        </p:txBody>
+      </p:sp>
+    </p:spTree>
+    <p:extLst>
+      <p:ext uri="{BB962C8B-B14F-4D97-AF65-F5344CB8AC3E}">
+        <p14:creationId xmlns:p14="http://schemas.microsoft.com/office/powerpoint/2010/main" val="3442334086"/>
+      </p:ext>
+    </p:extLst>
+  </p:cSld>
+  <p:clrMapOvr>
+    <a:masterClrMapping/>
+  </p:clrMapOvr>
+</p:sld>
+</file>
+
+<file path=ppt/slides/slide20.xml><?xml version="1.0" encoding="utf-8"?>
+<p:sld xmlns:a="http://schemas.openxmlformats.org/drawingml/2006/main" xmlns:r="http://schemas.openxmlformats.org/officeDocument/2006/relationships" xmlns:p="http://schemas.openxmlformats.org/presentationml/2006/main">
+  <p:cSld>
+    <p:spTree>
+      <p:nvGrpSpPr>
+        <p:cNvPr id="1" name=""/>
+        <p:cNvGrpSpPr/>
+        <p:nvPr/>
+      </p:nvGrpSpPr>
+      <p:grpSpPr>
+        <a:xfrm>
+          <a:off x="0" y="0"/>
+          <a:ext cx="0" cy="0"/>
+          <a:chOff x="0" y="0"/>
+          <a:chExt cx="0" cy="0"/>
+        </a:xfrm>
+      </p:grpSpPr>
+      <p:sp>
+        <p:nvSpPr>
+          <p:cNvPr id="2" name="Title 1">
+            <a:extLst>
+              <a:ext uri="{FF2B5EF4-FFF2-40B4-BE49-F238E27FC236}">
+                <a16:creationId xmlns:a16="http://schemas.microsoft.com/office/drawing/2014/main" id="{6274BA2C-32A4-E0CA-0DC2-652FFFC7F3EB}"/>
+              </a:ext>
+            </a:extLst>
+          </p:cNvPr>
+          <p:cNvSpPr>
+            <a:spLocks noGrp="1"/>
+          </p:cNvSpPr>
+          <p:nvPr>
+            <p:ph type="title"/>
+          </p:nvPr>
+        </p:nvSpPr>
+        <p:spPr/>
+        <p:txBody>
+          <a:bodyPr/>
+          <a:lstStyle/>
+          <a:p>
+            <a:r>
+              <a:rPr lang="en-US" dirty="0"/>
+              <a:t>The Good</a:t>
+            </a:r>
+          </a:p>
+        </p:txBody>
+      </p:sp>
+      <p:sp>
+        <p:nvSpPr>
+          <p:cNvPr id="3" name="Content Placeholder 2">
+            <a:extLst>
+              <a:ext uri="{FF2B5EF4-FFF2-40B4-BE49-F238E27FC236}">
+                <a16:creationId xmlns:a16="http://schemas.microsoft.com/office/drawing/2014/main" id="{FEAB5917-8937-06D2-D327-EDAF413B0E4C}"/>
+              </a:ext>
+            </a:extLst>
+          </p:cNvPr>
+          <p:cNvSpPr>
+            <a:spLocks noGrp="1"/>
+          </p:cNvSpPr>
+          <p:nvPr>
+            <p:ph idx="1"/>
+          </p:nvPr>
+        </p:nvSpPr>
+        <p:spPr/>
+        <p:txBody>
+          <a:bodyPr/>
+          <a:lstStyle/>
+          <a:p>
+            <a:r>
+              <a:rPr lang="en-US" dirty="0"/>
+              <a:t>Debugging in cycles is amazing</a:t>
+            </a:r>
+          </a:p>
+          <a:p>
+            <a:endParaRPr lang="en-US" dirty="0"/>
+          </a:p>
+        </p:txBody>
+      </p:sp>
+      <p:sp>
+        <p:nvSpPr>
+          <p:cNvPr id="4" name="Slide Number Placeholder 3">
+            <a:extLst>
+              <a:ext uri="{FF2B5EF4-FFF2-40B4-BE49-F238E27FC236}">
+                <a16:creationId xmlns:a16="http://schemas.microsoft.com/office/drawing/2014/main" id="{C110A42B-783C-3A53-F192-079D2B19DF6E}"/>
+              </a:ext>
+            </a:extLst>
+          </p:cNvPr>
+          <p:cNvSpPr>
+            <a:spLocks noGrp="1"/>
+          </p:cNvSpPr>
+          <p:nvPr>
+            <p:ph type="sldNum" sz="quarter" idx="4"/>
+          </p:nvPr>
+        </p:nvSpPr>
+        <p:spPr/>
+        <p:txBody>
+          <a:bodyPr/>
+          <a:lstStyle/>
+          <a:p>
+            <a:fld id="{FA19DD11-D068-0E4A-8D95-134F79C17C0A}" type="slidenum">
+              <a:rPr lang="en-US" smtClean="0"/>
+              <a:pPr/>
+              <a:t>20</a:t>
+            </a:fld>
+            <a:endParaRPr lang="en-US"/>
+          </a:p>
+        </p:txBody>
+      </p:sp>
+    </p:spTree>
+    <p:extLst>
+      <p:ext uri="{BB962C8B-B14F-4D97-AF65-F5344CB8AC3E}">
+        <p14:creationId xmlns:p14="http://schemas.microsoft.com/office/powerpoint/2010/main" val="3790886178"/>
+      </p:ext>
+    </p:extLst>
+  </p:cSld>
+  <p:clrMapOvr>
+    <a:masterClrMapping/>
+  </p:clrMapOvr>
+</p:sld>
+</file>
+
+<file path=ppt/slides/slide21.xml><?xml version="1.0" encoding="utf-8"?>
+<p:sld xmlns:a="http://schemas.openxmlformats.org/drawingml/2006/main" xmlns:r="http://schemas.openxmlformats.org/officeDocument/2006/relationships" xmlns:p="http://schemas.openxmlformats.org/presentationml/2006/main">
+  <p:cSld>
+    <p:spTree>
+      <p:nvGrpSpPr>
+        <p:cNvPr id="1" name=""/>
+        <p:cNvGrpSpPr/>
+        <p:nvPr/>
+      </p:nvGrpSpPr>
+      <p:grpSpPr>
+        <a:xfrm>
+          <a:off x="0" y="0"/>
+          <a:ext cx="0" cy="0"/>
+          <a:chOff x="0" y="0"/>
+          <a:chExt cx="0" cy="0"/>
+        </a:xfrm>
+      </p:grpSpPr>
+      <p:sp>
+        <p:nvSpPr>
+          <p:cNvPr id="2" name="Title 1">
+            <a:extLst>
+              <a:ext uri="{FF2B5EF4-FFF2-40B4-BE49-F238E27FC236}">
+                <a16:creationId xmlns:a16="http://schemas.microsoft.com/office/drawing/2014/main" id="{920914EF-6FFB-E055-B8A7-E80AFF5C56C3}"/>
+              </a:ext>
+            </a:extLst>
+          </p:cNvPr>
+          <p:cNvSpPr>
+            <a:spLocks noGrp="1"/>
+          </p:cNvSpPr>
+          <p:nvPr>
+            <p:ph type="title"/>
+          </p:nvPr>
+        </p:nvSpPr>
+        <p:spPr/>
+        <p:txBody>
+          <a:bodyPr/>
+          <a:lstStyle/>
+          <a:p>
+            <a:r>
+              <a:rPr lang="en-US" dirty="0"/>
+              <a:t>The Bad</a:t>
+            </a:r>
+          </a:p>
+        </p:txBody>
+      </p:sp>
+      <p:sp>
+        <p:nvSpPr>
+          <p:cNvPr id="3" name="Content Placeholder 2">
+            <a:extLst>
+              <a:ext uri="{FF2B5EF4-FFF2-40B4-BE49-F238E27FC236}">
+                <a16:creationId xmlns:a16="http://schemas.microsoft.com/office/drawing/2014/main" id="{BA74A380-0797-034B-FC2D-07BDCD6541AC}"/>
+              </a:ext>
+            </a:extLst>
+          </p:cNvPr>
+          <p:cNvSpPr>
+            <a:spLocks noGrp="1"/>
+          </p:cNvSpPr>
+          <p:nvPr>
+            <p:ph idx="1"/>
+          </p:nvPr>
+        </p:nvSpPr>
+        <p:spPr/>
+        <p:txBody>
+          <a:bodyPr/>
+          <a:lstStyle/>
+          <a:p>
+            <a:r>
+              <a:rPr lang="en-US" dirty="0"/>
+              <a:t>Who even learns this stuff?</a:t>
+            </a:r>
+          </a:p>
+        </p:txBody>
+      </p:sp>
+      <p:sp>
+        <p:nvSpPr>
+          <p:cNvPr id="4" name="Slide Number Placeholder 3">
+            <a:extLst>
+              <a:ext uri="{FF2B5EF4-FFF2-40B4-BE49-F238E27FC236}">
+                <a16:creationId xmlns:a16="http://schemas.microsoft.com/office/drawing/2014/main" id="{DEA4FE21-9862-F78C-ADEF-C7F96A0DA110}"/>
+              </a:ext>
+            </a:extLst>
+          </p:cNvPr>
+          <p:cNvSpPr>
+            <a:spLocks noGrp="1"/>
+          </p:cNvSpPr>
+          <p:nvPr>
+            <p:ph type="sldNum" sz="quarter" idx="4"/>
+          </p:nvPr>
+        </p:nvSpPr>
+        <p:spPr/>
+        <p:txBody>
+          <a:bodyPr/>
+          <a:lstStyle/>
+          <a:p>
+            <a:fld id="{FA19DD11-D068-0E4A-8D95-134F79C17C0A}" type="slidenum">
+              <a:rPr lang="en-US" smtClean="0"/>
+              <a:pPr/>
+              <a:t>21</a:t>
+            </a:fld>
+            <a:endParaRPr lang="en-US"/>
+          </a:p>
+        </p:txBody>
+      </p:sp>
+    </p:spTree>
+    <p:extLst>
+      <p:ext uri="{BB962C8B-B14F-4D97-AF65-F5344CB8AC3E}">
+        <p14:creationId xmlns:p14="http://schemas.microsoft.com/office/powerpoint/2010/main" val="1079630310"/>
+      </p:ext>
+    </p:extLst>
+  </p:cSld>
+  <p:clrMapOvr>
+    <a:masterClrMapping/>
+  </p:clrMapOvr>
+</p:sld>
+</file>
+
+<file path=ppt/slides/slide22.xml><?xml version="1.0" encoding="utf-8"?>
+<p:sld xmlns:a="http://schemas.openxmlformats.org/drawingml/2006/main" xmlns:r="http://schemas.openxmlformats.org/officeDocument/2006/relationships" xmlns:p="http://schemas.openxmlformats.org/presentationml/2006/main">
+  <p:cSld>
+    <p:spTree>
+      <p:nvGrpSpPr>
+        <p:cNvPr id="1" name=""/>
+        <p:cNvGrpSpPr/>
+        <p:nvPr/>
+      </p:nvGrpSpPr>
+      <p:grpSpPr>
+        <a:xfrm>
+          <a:off x="0" y="0"/>
+          <a:ext cx="0" cy="0"/>
+          <a:chOff x="0" y="0"/>
+          <a:chExt cx="0" cy="0"/>
+        </a:xfrm>
+      </p:grpSpPr>
+      <p:sp>
+        <p:nvSpPr>
+          <p:cNvPr id="2" name="Title 1">
+            <a:extLst>
+              <a:ext uri="{FF2B5EF4-FFF2-40B4-BE49-F238E27FC236}">
+                <a16:creationId xmlns:a16="http://schemas.microsoft.com/office/drawing/2014/main" id="{C36DCDA5-3CC5-4B99-BD4E-C8B4FA1FD6AF}"/>
+              </a:ext>
+            </a:extLst>
+          </p:cNvPr>
+          <p:cNvSpPr>
+            <a:spLocks noGrp="1"/>
+          </p:cNvSpPr>
+          <p:nvPr>
+            <p:ph type="title"/>
+          </p:nvPr>
+        </p:nvSpPr>
+        <p:spPr/>
+        <p:txBody>
+          <a:bodyPr/>
+          <a:lstStyle/>
+          <a:p>
+            <a:r>
+              <a:rPr lang="en-US" dirty="0"/>
+              <a:t>The Ugly</a:t>
+            </a:r>
+          </a:p>
+        </p:txBody>
+      </p:sp>
+      <p:sp>
+        <p:nvSpPr>
+          <p:cNvPr id="3" name="Content Placeholder 2">
+            <a:extLst>
+              <a:ext uri="{FF2B5EF4-FFF2-40B4-BE49-F238E27FC236}">
+                <a16:creationId xmlns:a16="http://schemas.microsoft.com/office/drawing/2014/main" id="{A3806713-E18F-4E5A-CA7B-D2B214CC02B0}"/>
+              </a:ext>
+            </a:extLst>
+          </p:cNvPr>
+          <p:cNvSpPr>
+            <a:spLocks noGrp="1"/>
+          </p:cNvSpPr>
+          <p:nvPr>
+            <p:ph idx="1"/>
+          </p:nvPr>
+        </p:nvSpPr>
+        <p:spPr/>
+        <p:txBody>
+          <a:bodyPr/>
+          <a:lstStyle/>
+          <a:p>
+            <a:r>
+              <a:rPr lang="en-US" dirty="0"/>
+              <a:t>Windows Only (This is changing!)</a:t>
+            </a:r>
+          </a:p>
+          <a:p>
+            <a:endParaRPr lang="en-US" dirty="0"/>
+          </a:p>
+        </p:txBody>
+      </p:sp>
+      <p:sp>
+        <p:nvSpPr>
+          <p:cNvPr id="4" name="Slide Number Placeholder 3">
+            <a:extLst>
+              <a:ext uri="{FF2B5EF4-FFF2-40B4-BE49-F238E27FC236}">
+                <a16:creationId xmlns:a16="http://schemas.microsoft.com/office/drawing/2014/main" id="{372DA699-ED20-DAB2-96EB-5A42C626DB2B}"/>
+              </a:ext>
+            </a:extLst>
+          </p:cNvPr>
+          <p:cNvSpPr>
+            <a:spLocks noGrp="1"/>
+          </p:cNvSpPr>
+          <p:nvPr>
+            <p:ph type="sldNum" sz="quarter" idx="4"/>
+          </p:nvPr>
+        </p:nvSpPr>
+        <p:spPr/>
+        <p:txBody>
+          <a:bodyPr/>
+          <a:lstStyle/>
+          <a:p>
+            <a:fld id="{FA19DD11-D068-0E4A-8D95-134F79C17C0A}" type="slidenum">
+              <a:rPr lang="en-US" smtClean="0"/>
+              <a:pPr/>
+              <a:t>22</a:t>
+            </a:fld>
+            <a:endParaRPr lang="en-US"/>
+          </a:p>
+        </p:txBody>
+      </p:sp>
+    </p:spTree>
+    <p:extLst>
+      <p:ext uri="{BB962C8B-B14F-4D97-AF65-F5344CB8AC3E}">
+        <p14:creationId xmlns:p14="http://schemas.microsoft.com/office/powerpoint/2010/main" val="4273523860"/>
+      </p:ext>
+    </p:extLst>
+  </p:cSld>
+  <p:clrMapOvr>
+    <a:masterClrMapping/>
+  </p:clrMapOvr>
+</p:sld>
+</file>
+
+<file path=ppt/slides/slide23.xml><?xml version="1.0" encoding="utf-8"?>
+<p:sld xmlns:a="http://schemas.openxmlformats.org/drawingml/2006/main" xmlns:r="http://schemas.openxmlformats.org/officeDocument/2006/relationships" xmlns:p="http://schemas.openxmlformats.org/presentationml/2006/main">
+  <p:cSld>
+    <p:spTree>
+      <p:nvGrpSpPr>
+        <p:cNvPr id="1" name=""/>
+        <p:cNvGrpSpPr/>
+        <p:nvPr/>
+      </p:nvGrpSpPr>
+      <p:grpSpPr>
+        <a:xfrm>
+          <a:off x="0" y="0"/>
+          <a:ext cx="0" cy="0"/>
+          <a:chOff x="0" y="0"/>
+          <a:chExt cx="0" cy="0"/>
+        </a:xfrm>
+      </p:grpSpPr>
+      <p:sp>
+        <p:nvSpPr>
+          <p:cNvPr id="2" name="Title 1">
+            <a:extLst>
+              <a:ext uri="{FF2B5EF4-FFF2-40B4-BE49-F238E27FC236}">
+                <a16:creationId xmlns:a16="http://schemas.microsoft.com/office/drawing/2014/main" id="{752BAE08-7DC9-4C97-1EDB-C51594516A68}"/>
+              </a:ext>
+            </a:extLst>
+          </p:cNvPr>
+          <p:cNvSpPr>
+            <a:spLocks noGrp="1"/>
+          </p:cNvSpPr>
+          <p:nvPr>
+            <p:ph type="title"/>
+          </p:nvPr>
+        </p:nvSpPr>
+        <p:spPr/>
+        <p:txBody>
+          <a:bodyPr/>
+          <a:lstStyle/>
+          <a:p>
+            <a:r>
+              <a:rPr lang="en-US" dirty="0"/>
+              <a:t>The really Ugly</a:t>
+            </a:r>
+          </a:p>
+        </p:txBody>
+      </p:sp>
+      <p:sp>
+        <p:nvSpPr>
+          <p:cNvPr id="3" name="Content Placeholder 2">
+            <a:extLst>
+              <a:ext uri="{FF2B5EF4-FFF2-40B4-BE49-F238E27FC236}">
+                <a16:creationId xmlns:a16="http://schemas.microsoft.com/office/drawing/2014/main" id="{763D51E3-275F-25E7-E1E3-784996E2EC78}"/>
+              </a:ext>
+            </a:extLst>
+          </p:cNvPr>
+          <p:cNvSpPr>
+            <a:spLocks noGrp="1"/>
+          </p:cNvSpPr>
+          <p:nvPr>
+            <p:ph idx="1"/>
+          </p:nvPr>
+        </p:nvSpPr>
+        <p:spPr/>
+        <p:txBody>
+          <a:bodyPr/>
+          <a:lstStyle/>
+          <a:p>
+            <a:r>
+              <a:rPr lang="en-US" dirty="0"/>
+              <a:t>Black Box Development</a:t>
+            </a:r>
+          </a:p>
+          <a:p>
+            <a:r>
+              <a:rPr lang="en-US" dirty="0"/>
+              <a:t>‘</a:t>
+            </a:r>
+            <a:r>
+              <a:rPr lang="en-US" dirty="0" err="1"/>
+              <a:t>Error:Error</a:t>
+            </a:r>
+            <a:r>
+              <a:rPr lang="en-US" dirty="0"/>
+              <a:t>’</a:t>
+            </a:r>
+          </a:p>
+          <a:p>
+            <a:r>
+              <a:rPr lang="en-US" dirty="0"/>
+              <a:t>Perpetual BSOD Loop</a:t>
+            </a:r>
+          </a:p>
+        </p:txBody>
+      </p:sp>
+      <p:sp>
+        <p:nvSpPr>
+          <p:cNvPr id="4" name="Slide Number Placeholder 3">
+            <a:extLst>
+              <a:ext uri="{FF2B5EF4-FFF2-40B4-BE49-F238E27FC236}">
+                <a16:creationId xmlns:a16="http://schemas.microsoft.com/office/drawing/2014/main" id="{908CE67E-C821-63D4-E778-78704F745925}"/>
+              </a:ext>
+            </a:extLst>
+          </p:cNvPr>
+          <p:cNvSpPr>
+            <a:spLocks noGrp="1"/>
+          </p:cNvSpPr>
+          <p:nvPr>
+            <p:ph type="sldNum" sz="quarter" idx="4"/>
+          </p:nvPr>
+        </p:nvSpPr>
+        <p:spPr/>
+        <p:txBody>
+          <a:bodyPr/>
+          <a:lstStyle/>
+          <a:p>
+            <a:fld id="{FA19DD11-D068-0E4A-8D95-134F79C17C0A}" type="slidenum">
+              <a:rPr lang="en-US" smtClean="0"/>
+              <a:pPr/>
+              <a:t>23</a:t>
+            </a:fld>
+            <a:endParaRPr lang="en-US"/>
+          </a:p>
+        </p:txBody>
+      </p:sp>
+    </p:spTree>
+    <p:extLst>
+      <p:ext uri="{BB962C8B-B14F-4D97-AF65-F5344CB8AC3E}">
+        <p14:creationId xmlns:p14="http://schemas.microsoft.com/office/powerpoint/2010/main" val="4092168817"/>
+      </p:ext>
+    </p:extLst>
+  </p:cSld>
+  <p:clrMapOvr>
+    <a:masterClrMapping/>
+  </p:clrMapOvr>
+</p:sld>
+</file>
+
+<file path=ppt/slides/slide24.xml><?xml version="1.0" encoding="utf-8"?>
+<p:sld xmlns:a="http://schemas.openxmlformats.org/drawingml/2006/main" xmlns:r="http://schemas.openxmlformats.org/officeDocument/2006/relationships" xmlns:p="http://schemas.openxmlformats.org/presentationml/2006/main">
+  <p:cSld>
+    <p:spTree>
+      <p:nvGrpSpPr>
+        <p:cNvPr id="1" name=""/>
+        <p:cNvGrpSpPr/>
+        <p:nvPr/>
+      </p:nvGrpSpPr>
+      <p:grpSpPr>
+        <a:xfrm>
+          <a:off x="0" y="0"/>
+          <a:ext cx="0" cy="0"/>
+          <a:chOff x="0" y="0"/>
+          <a:chExt cx="0" cy="0"/>
+        </a:xfrm>
+      </p:grpSpPr>
+      <p:sp>
+        <p:nvSpPr>
+          <p:cNvPr id="2" name="Title 1">
+            <a:extLst>
+              <a:ext uri="{FF2B5EF4-FFF2-40B4-BE49-F238E27FC236}">
+                <a16:creationId xmlns:a16="http://schemas.microsoft.com/office/drawing/2014/main" id="{62EC9C4A-D775-AE1F-3D91-2454EDC06769}"/>
+              </a:ext>
+            </a:extLst>
+          </p:cNvPr>
+          <p:cNvSpPr>
+            <a:spLocks noGrp="1"/>
+          </p:cNvSpPr>
+          <p:nvPr>
+            <p:ph type="title"/>
+          </p:nvPr>
+        </p:nvSpPr>
+        <p:spPr/>
+        <p:txBody>
+          <a:bodyPr/>
+          <a:lstStyle/>
+          <a:p>
+            <a:r>
+              <a:rPr lang="en-US" dirty="0"/>
+              <a:t>Put a price tag on this.</a:t>
+            </a:r>
+          </a:p>
+        </p:txBody>
+      </p:sp>
+      <p:sp>
+        <p:nvSpPr>
+          <p:cNvPr id="3" name="Content Placeholder 2">
+            <a:extLst>
+              <a:ext uri="{FF2B5EF4-FFF2-40B4-BE49-F238E27FC236}">
+                <a16:creationId xmlns:a16="http://schemas.microsoft.com/office/drawing/2014/main" id="{EBCE578D-5624-1F5F-0A25-C295CE176BCE}"/>
+              </a:ext>
+            </a:extLst>
+          </p:cNvPr>
+          <p:cNvSpPr>
+            <a:spLocks noGrp="1"/>
+          </p:cNvSpPr>
+          <p:nvPr>
+            <p:ph idx="1"/>
+          </p:nvPr>
+        </p:nvSpPr>
+        <p:spPr/>
+        <p:txBody>
+          <a:bodyPr/>
+          <a:lstStyle/>
+          <a:p>
+            <a:endParaRPr lang="en-US"/>
+          </a:p>
+        </p:txBody>
+      </p:sp>
+      <p:sp>
+        <p:nvSpPr>
+          <p:cNvPr id="4" name="Slide Number Placeholder 3">
+            <a:extLst>
+              <a:ext uri="{FF2B5EF4-FFF2-40B4-BE49-F238E27FC236}">
+                <a16:creationId xmlns:a16="http://schemas.microsoft.com/office/drawing/2014/main" id="{33E0C7FF-7DC1-A717-611A-4BBC43E09826}"/>
+              </a:ext>
+            </a:extLst>
+          </p:cNvPr>
+          <p:cNvSpPr>
+            <a:spLocks noGrp="1"/>
+          </p:cNvSpPr>
+          <p:nvPr>
+            <p:ph type="sldNum" sz="quarter" idx="4"/>
+          </p:nvPr>
+        </p:nvSpPr>
+        <p:spPr/>
+        <p:txBody>
+          <a:bodyPr/>
+          <a:lstStyle/>
+          <a:p>
+            <a:fld id="{FA19DD11-D068-0E4A-8D95-134F79C17C0A}" type="slidenum">
+              <a:rPr lang="en-US" smtClean="0"/>
+              <a:pPr/>
+              <a:t>24</a:t>
+            </a:fld>
+            <a:endParaRPr lang="en-US"/>
+          </a:p>
+        </p:txBody>
+      </p:sp>
+    </p:spTree>
+    <p:extLst>
+      <p:ext uri="{BB962C8B-B14F-4D97-AF65-F5344CB8AC3E}">
+        <p14:creationId xmlns:p14="http://schemas.microsoft.com/office/powerpoint/2010/main" val="126983596"/>
+      </p:ext>
+    </p:extLst>
+  </p:cSld>
+  <p:clrMapOvr>
+    <a:masterClrMapping/>
+  </p:clrMapOvr>
+</p:sld>
+</file>
+
+<file path=ppt/slides/slide25.xml><?xml version="1.0" encoding="utf-8"?>
+<p:sld xmlns:a="http://schemas.openxmlformats.org/drawingml/2006/main" xmlns:r="http://schemas.openxmlformats.org/officeDocument/2006/relationships" xmlns:p="http://schemas.openxmlformats.org/presentationml/2006/main">
+  <p:cSld>
+    <p:spTree>
+      <p:nvGrpSpPr>
+        <p:cNvPr id="1" name=""/>
+        <p:cNvGrpSpPr/>
+        <p:nvPr/>
+      </p:nvGrpSpPr>
+      <p:grpSpPr>
+        <a:xfrm>
+          <a:off x="0" y="0"/>
+          <a:ext cx="0" cy="0"/>
+          <a:chOff x="0" y="0"/>
+          <a:chExt cx="0" cy="0"/>
+        </a:xfrm>
+      </p:grpSpPr>
+      <p:sp>
+        <p:nvSpPr>
+          <p:cNvPr id="2" name="Title 1">
+            <a:extLst>
+              <a:ext uri="{FF2B5EF4-FFF2-40B4-BE49-F238E27FC236}">
+                <a16:creationId xmlns:a16="http://schemas.microsoft.com/office/drawing/2014/main" id="{BDBD8638-5752-E552-1059-FC3508783B41}"/>
+              </a:ext>
+            </a:extLst>
+          </p:cNvPr>
+          <p:cNvSpPr>
+            <a:spLocks noGrp="1"/>
+          </p:cNvSpPr>
+          <p:nvPr>
+            <p:ph type="title"/>
+          </p:nvPr>
+        </p:nvSpPr>
+        <p:spPr/>
+        <p:txBody>
+          <a:bodyPr/>
+          <a:lstStyle/>
+          <a:p>
+            <a:r>
+              <a:rPr lang="en-US" dirty="0"/>
+              <a:t>Why this is… ok (sort of)</a:t>
+            </a:r>
+          </a:p>
+        </p:txBody>
+      </p:sp>
+      <p:sp>
+        <p:nvSpPr>
+          <p:cNvPr id="3" name="Content Placeholder 2">
+            <a:extLst>
+              <a:ext uri="{FF2B5EF4-FFF2-40B4-BE49-F238E27FC236}">
+                <a16:creationId xmlns:a16="http://schemas.microsoft.com/office/drawing/2014/main" id="{F8A40E6C-232A-A192-9D26-702D9750341E}"/>
+              </a:ext>
+            </a:extLst>
+          </p:cNvPr>
+          <p:cNvSpPr>
+            <a:spLocks noGrp="1"/>
+          </p:cNvSpPr>
+          <p:nvPr>
+            <p:ph idx="1"/>
+          </p:nvPr>
+        </p:nvSpPr>
+        <p:spPr/>
+        <p:txBody>
+          <a:bodyPr/>
+          <a:lstStyle/>
+          <a:p>
+            <a:r>
+              <a:rPr lang="en-US" dirty="0"/>
+              <a:t>Hardware is… hard. This stuff has material costs.</a:t>
+            </a:r>
+          </a:p>
+          <a:p>
+            <a:r>
+              <a:rPr lang="en-US" dirty="0"/>
+              <a:t>When a project is in the Millions of USD. What’s the problem?</a:t>
+            </a:r>
+          </a:p>
+          <a:p>
+            <a:r>
+              <a:rPr lang="en-US" dirty="0"/>
+              <a:t>Honestly, paid software comes with a lot of social expectations that need to be enforced *</a:t>
+            </a:r>
+          </a:p>
+        </p:txBody>
+      </p:sp>
+      <p:sp>
+        <p:nvSpPr>
+          <p:cNvPr id="4" name="Slide Number Placeholder 3">
+            <a:extLst>
+              <a:ext uri="{FF2B5EF4-FFF2-40B4-BE49-F238E27FC236}">
+                <a16:creationId xmlns:a16="http://schemas.microsoft.com/office/drawing/2014/main" id="{D7EF2CA8-8DD3-12E8-0D16-42E11F5220DE}"/>
+              </a:ext>
+            </a:extLst>
+          </p:cNvPr>
+          <p:cNvSpPr>
+            <a:spLocks noGrp="1"/>
+          </p:cNvSpPr>
+          <p:nvPr>
+            <p:ph type="sldNum" sz="quarter" idx="4"/>
+          </p:nvPr>
+        </p:nvSpPr>
+        <p:spPr/>
+        <p:txBody>
+          <a:bodyPr/>
+          <a:lstStyle/>
+          <a:p>
+            <a:fld id="{FA19DD11-D068-0E4A-8D95-134F79C17C0A}" type="slidenum">
+              <a:rPr lang="en-US" smtClean="0"/>
+              <a:pPr/>
+              <a:t>25</a:t>
+            </a:fld>
+            <a:endParaRPr lang="en-US"/>
+          </a:p>
+        </p:txBody>
+      </p:sp>
+    </p:spTree>
+    <p:extLst>
+      <p:ext uri="{BB962C8B-B14F-4D97-AF65-F5344CB8AC3E}">
+        <p14:creationId xmlns:p14="http://schemas.microsoft.com/office/powerpoint/2010/main" val="916978901"/>
+      </p:ext>
+    </p:extLst>
+  </p:cSld>
+  <p:clrMapOvr>
+    <a:masterClrMapping/>
+  </p:clrMapOvr>
+</p:sld>
+</file>
+
+<file path=ppt/slides/slide26.xml><?xml version="1.0" encoding="utf-8"?>
+<p:sld xmlns:a="http://schemas.openxmlformats.org/drawingml/2006/main" xmlns:r="http://schemas.openxmlformats.org/officeDocument/2006/relationships" xmlns:p="http://schemas.openxmlformats.org/presentationml/2006/main">
+  <p:cSld>
+    <p:spTree>
+      <p:nvGrpSpPr>
+        <p:cNvPr id="1" name=""/>
+        <p:cNvGrpSpPr/>
+        <p:nvPr/>
+      </p:nvGrpSpPr>
+      <p:grpSpPr>
+        <a:xfrm>
+          <a:off x="0" y="0"/>
+          <a:ext cx="0" cy="0"/>
+          <a:chOff x="0" y="0"/>
+          <a:chExt cx="0" cy="0"/>
+        </a:xfrm>
+      </p:grpSpPr>
+      <p:sp>
+        <p:nvSpPr>
+          <p:cNvPr id="2" name="Title 1">
+            <a:extLst>
+              <a:ext uri="{FF2B5EF4-FFF2-40B4-BE49-F238E27FC236}">
+                <a16:creationId xmlns:a16="http://schemas.microsoft.com/office/drawing/2014/main" id="{9E03D0C0-4A11-9DE3-AF34-A34EC6A27156}"/>
+              </a:ext>
+            </a:extLst>
+          </p:cNvPr>
+          <p:cNvSpPr>
+            <a:spLocks noGrp="1"/>
+          </p:cNvSpPr>
+          <p:nvPr>
+            <p:ph type="title"/>
+          </p:nvPr>
+        </p:nvSpPr>
+        <p:spPr/>
+        <p:txBody>
+          <a:bodyPr/>
+          <a:lstStyle/>
+          <a:p>
+            <a:r>
+              <a:rPr lang="en-US" dirty="0"/>
+              <a:t>Insert </a:t>
+            </a:r>
+            <a:r>
+              <a:rPr lang="en-US" dirty="0" err="1"/>
+              <a:t>Clippy</a:t>
+            </a:r>
+            <a:r>
+              <a:rPr lang="en-US" dirty="0"/>
+              <a:t> telling you to fuck off.</a:t>
+            </a:r>
+          </a:p>
+        </p:txBody>
+      </p:sp>
+      <p:sp>
+        <p:nvSpPr>
+          <p:cNvPr id="3" name="Content Placeholder 2">
+            <a:extLst>
+              <a:ext uri="{FF2B5EF4-FFF2-40B4-BE49-F238E27FC236}">
+                <a16:creationId xmlns:a16="http://schemas.microsoft.com/office/drawing/2014/main" id="{FCC4C12A-2CCB-2224-79C3-4B66E15BFFA5}"/>
+              </a:ext>
+            </a:extLst>
+          </p:cNvPr>
+          <p:cNvSpPr>
+            <a:spLocks noGrp="1"/>
+          </p:cNvSpPr>
+          <p:nvPr>
+            <p:ph idx="1"/>
+          </p:nvPr>
+        </p:nvSpPr>
+        <p:spPr/>
+        <p:txBody>
+          <a:bodyPr/>
+          <a:lstStyle/>
+          <a:p>
+            <a:endParaRPr lang="en-US" dirty="0"/>
+          </a:p>
+        </p:txBody>
+      </p:sp>
+      <p:sp>
+        <p:nvSpPr>
+          <p:cNvPr id="4" name="Slide Number Placeholder 3">
+            <a:extLst>
+              <a:ext uri="{FF2B5EF4-FFF2-40B4-BE49-F238E27FC236}">
+                <a16:creationId xmlns:a16="http://schemas.microsoft.com/office/drawing/2014/main" id="{A96D235E-0BBE-CD1D-F1D0-B8A59079919B}"/>
+              </a:ext>
+            </a:extLst>
+          </p:cNvPr>
+          <p:cNvSpPr>
+            <a:spLocks noGrp="1"/>
+          </p:cNvSpPr>
+          <p:nvPr>
+            <p:ph type="sldNum" sz="quarter" idx="4"/>
+          </p:nvPr>
+        </p:nvSpPr>
+        <p:spPr/>
+        <p:txBody>
+          <a:bodyPr/>
+          <a:lstStyle/>
+          <a:p>
+            <a:fld id="{FA19DD11-D068-0E4A-8D95-134F79C17C0A}" type="slidenum">
+              <a:rPr lang="en-US" smtClean="0"/>
+              <a:pPr/>
+              <a:t>26</a:t>
+            </a:fld>
+            <a:endParaRPr lang="en-US"/>
+          </a:p>
+        </p:txBody>
+      </p:sp>
+    </p:spTree>
+    <p:extLst>
+      <p:ext uri="{BB962C8B-B14F-4D97-AF65-F5344CB8AC3E}">
+        <p14:creationId xmlns:p14="http://schemas.microsoft.com/office/powerpoint/2010/main" val="4002554569"/>
+      </p:ext>
+    </p:extLst>
+  </p:cSld>
+  <p:clrMapOvr>
+    <a:masterClrMapping/>
+  </p:clrMapOvr>
+</p:sld>
+</file>
+
+<file path=ppt/slides/slide27.xml><?xml version="1.0" encoding="utf-8"?>
+<p:sld xmlns:a="http://schemas.openxmlformats.org/drawingml/2006/main" xmlns:r="http://schemas.openxmlformats.org/officeDocument/2006/relationships" xmlns:p="http://schemas.openxmlformats.org/presentationml/2006/main">
+  <p:cSld>
+    <p:spTree>
+      <p:nvGrpSpPr>
+        <p:cNvPr id="1" name="">
+          <a:extLst>
+            <a:ext uri="{FF2B5EF4-FFF2-40B4-BE49-F238E27FC236}">
+              <a16:creationId xmlns:a16="http://schemas.microsoft.com/office/drawing/2014/main" id="{C41B7332-B1E8-F04D-4DF4-6B66A9D54304}"/>
+            </a:ext>
+          </a:extLst>
+        </p:cNvPr>
+        <p:cNvGrpSpPr/>
+        <p:nvPr/>
+      </p:nvGrpSpPr>
+      <p:grpSpPr>
+        <a:xfrm>
+          <a:off x="0" y="0"/>
+          <a:ext cx="0" cy="0"/>
+          <a:chOff x="0" y="0"/>
+          <a:chExt cx="0" cy="0"/>
+        </a:xfrm>
+      </p:grpSpPr>
+      <p:sp>
+        <p:nvSpPr>
+          <p:cNvPr id="2" name="Title 1">
+            <a:extLst>
+              <a:ext uri="{FF2B5EF4-FFF2-40B4-BE49-F238E27FC236}">
+                <a16:creationId xmlns:a16="http://schemas.microsoft.com/office/drawing/2014/main" id="{7C093B41-A0BD-194A-99BA-4E723B0B2A49}"/>
+              </a:ext>
+            </a:extLst>
+          </p:cNvPr>
+          <p:cNvSpPr>
+            <a:spLocks noGrp="1"/>
+          </p:cNvSpPr>
+          <p:nvPr>
+            <p:ph type="title"/>
+          </p:nvPr>
+        </p:nvSpPr>
+        <p:spPr/>
+        <p:txBody>
+          <a:bodyPr/>
+          <a:lstStyle/>
+          <a:p>
+            <a:r>
+              <a:rPr lang="en-US" dirty="0"/>
+              <a:t>Why this is… ok (sort of)</a:t>
+            </a:r>
+          </a:p>
+        </p:txBody>
+      </p:sp>
+      <p:sp>
+        <p:nvSpPr>
+          <p:cNvPr id="3" name="Content Placeholder 2">
+            <a:extLst>
+              <a:ext uri="{FF2B5EF4-FFF2-40B4-BE49-F238E27FC236}">
+                <a16:creationId xmlns:a16="http://schemas.microsoft.com/office/drawing/2014/main" id="{84961665-E8EC-0240-970B-1DAEFF7E4C38}"/>
+              </a:ext>
+            </a:extLst>
+          </p:cNvPr>
+          <p:cNvSpPr>
+            <a:spLocks noGrp="1"/>
+          </p:cNvSpPr>
+          <p:nvPr>
+            <p:ph idx="1"/>
+          </p:nvPr>
+        </p:nvSpPr>
+        <p:spPr/>
+        <p:txBody>
+          <a:bodyPr/>
+          <a:lstStyle/>
+          <a:p>
+            <a:r>
+              <a:rPr lang="en-US" dirty="0"/>
+              <a:t>Hardware is… hard. This stuff has material costs.</a:t>
+            </a:r>
+          </a:p>
+          <a:p>
+            <a:r>
+              <a:rPr lang="en-US" dirty="0"/>
+              <a:t>When a project is in the Millions of USD. What’s the problem?</a:t>
+            </a:r>
+          </a:p>
+          <a:p>
+            <a:r>
+              <a:rPr lang="en-US" dirty="0"/>
+              <a:t>Honestly, paid software comes with a lot of social expectations that need to be enforced *</a:t>
+            </a:r>
+          </a:p>
+          <a:p>
+            <a:endParaRPr lang="en-US" dirty="0"/>
+          </a:p>
+          <a:p>
+            <a:endParaRPr lang="en-US" dirty="0"/>
+          </a:p>
+          <a:p>
+            <a:endParaRPr lang="en-US" dirty="0"/>
+          </a:p>
+          <a:p>
+            <a:pPr marL="0" indent="0">
+              <a:buNone/>
+            </a:pPr>
+            <a:r>
+              <a:rPr lang="en-US" dirty="0"/>
+              <a:t>*Windows 11 excluded.</a:t>
+            </a:r>
+          </a:p>
+        </p:txBody>
+      </p:sp>
+      <p:sp>
+        <p:nvSpPr>
+          <p:cNvPr id="4" name="Slide Number Placeholder 3">
+            <a:extLst>
+              <a:ext uri="{FF2B5EF4-FFF2-40B4-BE49-F238E27FC236}">
+                <a16:creationId xmlns:a16="http://schemas.microsoft.com/office/drawing/2014/main" id="{7441191E-2057-65BB-FD3B-4144CAE52707}"/>
+              </a:ext>
+            </a:extLst>
+          </p:cNvPr>
+          <p:cNvSpPr>
+            <a:spLocks noGrp="1"/>
+          </p:cNvSpPr>
+          <p:nvPr>
+            <p:ph type="sldNum" sz="quarter" idx="4"/>
+          </p:nvPr>
+        </p:nvSpPr>
+        <p:spPr/>
+        <p:txBody>
+          <a:bodyPr/>
+          <a:lstStyle/>
+          <a:p>
+            <a:fld id="{FA19DD11-D068-0E4A-8D95-134F79C17C0A}" type="slidenum">
+              <a:rPr lang="en-US" smtClean="0"/>
+              <a:pPr/>
+              <a:t>27</a:t>
+            </a:fld>
+            <a:endParaRPr lang="en-US"/>
+          </a:p>
+        </p:txBody>
+      </p:sp>
+    </p:spTree>
+    <p:extLst>
+      <p:ext uri="{BB962C8B-B14F-4D97-AF65-F5344CB8AC3E}">
+        <p14:creationId xmlns:p14="http://schemas.microsoft.com/office/powerpoint/2010/main" val="3197901589"/>
+      </p:ext>
+    </p:extLst>
+  </p:cSld>
+  <p:clrMapOvr>
+    <a:masterClrMapping/>
+  </p:clrMapOvr>
+</p:sld>
+</file>
+
+<file path=ppt/slides/slide28.xml><?xml version="1.0" encoding="utf-8"?>
+<p:sld xmlns:a="http://schemas.openxmlformats.org/drawingml/2006/main" xmlns:r="http://schemas.openxmlformats.org/officeDocument/2006/relationships" xmlns:p="http://schemas.openxmlformats.org/presentationml/2006/main">
+  <p:cSld>
+    <p:spTree>
+      <p:nvGrpSpPr>
+        <p:cNvPr id="1" name=""/>
+        <p:cNvGrpSpPr/>
+        <p:nvPr/>
+      </p:nvGrpSpPr>
+      <p:grpSpPr>
+        <a:xfrm>
+          <a:off x="0" y="0"/>
+          <a:ext cx="0" cy="0"/>
+          <a:chOff x="0" y="0"/>
+          <a:chExt cx="0" cy="0"/>
+        </a:xfrm>
+      </p:grpSpPr>
+      <p:sp>
+        <p:nvSpPr>
+          <p:cNvPr id="2" name="Title 1">
+            <a:extLst>
+              <a:ext uri="{FF2B5EF4-FFF2-40B4-BE49-F238E27FC236}">
+                <a16:creationId xmlns:a16="http://schemas.microsoft.com/office/drawing/2014/main" id="{40599810-7EB1-9C4D-2DC6-6CA09207FE89}"/>
+              </a:ext>
+            </a:extLst>
+          </p:cNvPr>
+          <p:cNvSpPr>
+            <a:spLocks noGrp="1"/>
+          </p:cNvSpPr>
+          <p:nvPr>
+            <p:ph type="title"/>
+          </p:nvPr>
+        </p:nvSpPr>
+        <p:spPr/>
+        <p:txBody>
+          <a:bodyPr/>
+          <a:lstStyle/>
+          <a:p>
+            <a:r>
+              <a:rPr lang="en-US" dirty="0"/>
+              <a:t>Licenses, Licenses, Licenses</a:t>
+            </a:r>
+          </a:p>
+        </p:txBody>
+      </p:sp>
+      <p:sp>
+        <p:nvSpPr>
+          <p:cNvPr id="3" name="Content Placeholder 2">
+            <a:extLst>
+              <a:ext uri="{FF2B5EF4-FFF2-40B4-BE49-F238E27FC236}">
+                <a16:creationId xmlns:a16="http://schemas.microsoft.com/office/drawing/2014/main" id="{9040A053-2BD0-9BBB-7811-6967C468B1A6}"/>
+              </a:ext>
+            </a:extLst>
+          </p:cNvPr>
+          <p:cNvSpPr>
+            <a:spLocks noGrp="1"/>
+          </p:cNvSpPr>
+          <p:nvPr>
+            <p:ph idx="1"/>
+          </p:nvPr>
+        </p:nvSpPr>
+        <p:spPr/>
+        <p:txBody>
+          <a:bodyPr/>
+          <a:lstStyle/>
+          <a:p>
+            <a:r>
+              <a:rPr lang="en-US" dirty="0"/>
+              <a:t>... And this is where a line </a:t>
+            </a:r>
+            <a:r>
+              <a:rPr lang="en-US" u="sng" dirty="0"/>
+              <a:t>needs</a:t>
+            </a:r>
+            <a:r>
+              <a:rPr lang="en-US" dirty="0"/>
+              <a:t> to be drawn.</a:t>
+            </a:r>
+          </a:p>
+          <a:p>
+            <a:pPr marL="0" indent="0">
+              <a:buNone/>
+            </a:pPr>
+            <a:endParaRPr lang="en-US" dirty="0"/>
+          </a:p>
+        </p:txBody>
+      </p:sp>
+      <p:sp>
+        <p:nvSpPr>
+          <p:cNvPr id="4" name="Slide Number Placeholder 3">
+            <a:extLst>
+              <a:ext uri="{FF2B5EF4-FFF2-40B4-BE49-F238E27FC236}">
+                <a16:creationId xmlns:a16="http://schemas.microsoft.com/office/drawing/2014/main" id="{4C8814A2-BD3A-E3D7-B1DA-365390D22A46}"/>
+              </a:ext>
+            </a:extLst>
+          </p:cNvPr>
+          <p:cNvSpPr>
+            <a:spLocks noGrp="1"/>
+          </p:cNvSpPr>
+          <p:nvPr>
+            <p:ph type="sldNum" sz="quarter" idx="4"/>
+          </p:nvPr>
+        </p:nvSpPr>
+        <p:spPr/>
+        <p:txBody>
+          <a:bodyPr/>
+          <a:lstStyle/>
+          <a:p>
+            <a:fld id="{FA19DD11-D068-0E4A-8D95-134F79C17C0A}" type="slidenum">
+              <a:rPr lang="en-US" smtClean="0"/>
+              <a:pPr/>
+              <a:t>28</a:t>
+            </a:fld>
+            <a:endParaRPr lang="en-US"/>
+          </a:p>
+        </p:txBody>
+      </p:sp>
+    </p:spTree>
+    <p:extLst>
+      <p:ext uri="{BB962C8B-B14F-4D97-AF65-F5344CB8AC3E}">
+        <p14:creationId xmlns:p14="http://schemas.microsoft.com/office/powerpoint/2010/main" val="546432503"/>
+      </p:ext>
+    </p:extLst>
+  </p:cSld>
+  <p:clrMapOvr>
+    <a:masterClrMapping/>
+  </p:clrMapOvr>
+</p:sld>
+</file>
+
+<file path=ppt/slides/slide29.xml><?xml version="1.0" encoding="utf-8"?>
+<p:sld xmlns:a="http://schemas.openxmlformats.org/drawingml/2006/main" xmlns:r="http://schemas.openxmlformats.org/officeDocument/2006/relationships" xmlns:p="http://schemas.openxmlformats.org/presentationml/2006/main">
+  <p:cSld>
+    <p:spTree>
+      <p:nvGrpSpPr>
+        <p:cNvPr id="1" name=""/>
+        <p:cNvGrpSpPr/>
+        <p:nvPr/>
+      </p:nvGrpSpPr>
+      <p:grpSpPr>
+        <a:xfrm>
+          <a:off x="0" y="0"/>
+          <a:ext cx="0" cy="0"/>
+          <a:chOff x="0" y="0"/>
+          <a:chExt cx="0" cy="0"/>
+        </a:xfrm>
+      </p:grpSpPr>
+      <p:sp>
+        <p:nvSpPr>
+          <p:cNvPr id="2" name="Title 1">
+            <a:extLst>
+              <a:ext uri="{FF2B5EF4-FFF2-40B4-BE49-F238E27FC236}">
+                <a16:creationId xmlns:a16="http://schemas.microsoft.com/office/drawing/2014/main" id="{9B30DF25-12E7-267A-DE86-D47ED6E5A0BD}"/>
+              </a:ext>
+            </a:extLst>
+          </p:cNvPr>
+          <p:cNvSpPr>
+            <a:spLocks noGrp="1"/>
+          </p:cNvSpPr>
+          <p:nvPr>
+            <p:ph type="title"/>
+          </p:nvPr>
+        </p:nvSpPr>
+        <p:spPr/>
+        <p:txBody>
+          <a:bodyPr/>
+          <a:lstStyle/>
+          <a:p>
+            <a:r>
+              <a:rPr lang="en-US" dirty="0"/>
+              <a:t>Hotel California.</a:t>
+            </a:r>
+          </a:p>
+        </p:txBody>
+      </p:sp>
+      <p:sp>
+        <p:nvSpPr>
+          <p:cNvPr id="3" name="Content Placeholder 2">
+            <a:extLst>
+              <a:ext uri="{FF2B5EF4-FFF2-40B4-BE49-F238E27FC236}">
+                <a16:creationId xmlns:a16="http://schemas.microsoft.com/office/drawing/2014/main" id="{A89078C2-093E-E547-8B47-F920FE2598E3}"/>
+              </a:ext>
+            </a:extLst>
+          </p:cNvPr>
+          <p:cNvSpPr>
+            <a:spLocks noGrp="1"/>
+          </p:cNvSpPr>
+          <p:nvPr>
+            <p:ph idx="1"/>
+          </p:nvPr>
+        </p:nvSpPr>
+        <p:spPr/>
+        <p:txBody>
+          <a:bodyPr/>
+          <a:lstStyle/>
+          <a:p>
+            <a:r>
+              <a:rPr lang="en-US" dirty="0"/>
+              <a:t>It’s comfy.</a:t>
+            </a:r>
+          </a:p>
+          <a:p>
+            <a:r>
+              <a:rPr lang="en-US" dirty="0"/>
+              <a:t>It’s convenient.</a:t>
+            </a:r>
+          </a:p>
+          <a:p>
+            <a:r>
+              <a:rPr lang="en-US" dirty="0"/>
+              <a:t>And the more time you spend here, the more it’s going to cost.</a:t>
+            </a:r>
+          </a:p>
+          <a:p>
+            <a:r>
+              <a:rPr lang="en-US" dirty="0"/>
+              <a:t>And a lot of these costs are hidden.</a:t>
+            </a:r>
+          </a:p>
+        </p:txBody>
+      </p:sp>
+      <p:sp>
+        <p:nvSpPr>
+          <p:cNvPr id="4" name="Slide Number Placeholder 3">
+            <a:extLst>
+              <a:ext uri="{FF2B5EF4-FFF2-40B4-BE49-F238E27FC236}">
+                <a16:creationId xmlns:a16="http://schemas.microsoft.com/office/drawing/2014/main" id="{4F741BF6-36F7-80F4-196F-B8933BEBE405}"/>
+              </a:ext>
+            </a:extLst>
+          </p:cNvPr>
+          <p:cNvSpPr>
+            <a:spLocks noGrp="1"/>
+          </p:cNvSpPr>
+          <p:nvPr>
+            <p:ph type="sldNum" sz="quarter" idx="4"/>
+          </p:nvPr>
+        </p:nvSpPr>
+        <p:spPr/>
+        <p:txBody>
+          <a:bodyPr/>
+          <a:lstStyle/>
+          <a:p>
+            <a:fld id="{FA19DD11-D068-0E4A-8D95-134F79C17C0A}" type="slidenum">
+              <a:rPr lang="en-US" smtClean="0"/>
+              <a:pPr/>
+              <a:t>29</a:t>
+            </a:fld>
+            <a:endParaRPr lang="en-US"/>
+          </a:p>
+        </p:txBody>
+      </p:sp>
+    </p:spTree>
+    <p:extLst>
+      <p:ext uri="{BB962C8B-B14F-4D97-AF65-F5344CB8AC3E}">
+        <p14:creationId xmlns:p14="http://schemas.microsoft.com/office/powerpoint/2010/main" val="1281944241"/>
+      </p:ext>
+    </p:extLst>
+  </p:cSld>
+  <p:clrMapOvr>
+    <a:masterClrMapping/>
+  </p:clrMapOvr>
+</p:sld>
+</file>
+
+<file path=ppt/slides/slide3.xml><?xml version="1.0" encoding="utf-8"?>
+<p:sld xmlns:a="http://schemas.openxmlformats.org/drawingml/2006/main" xmlns:r="http://schemas.openxmlformats.org/officeDocument/2006/relationships" xmlns:p="http://schemas.openxmlformats.org/presentationml/2006/main">
+  <p:cSld>
+    <p:spTree>
+      <p:nvGrpSpPr>
+        <p:cNvPr id="1" name=""/>
+        <p:cNvGrpSpPr/>
+        <p:nvPr/>
+      </p:nvGrpSpPr>
+      <p:grpSpPr>
+        <a:xfrm>
+          <a:off x="0" y="0"/>
+          <a:ext cx="0" cy="0"/>
+          <a:chOff x="0" y="0"/>
+          <a:chExt cx="0" cy="0"/>
+        </a:xfrm>
+      </p:grpSpPr>
+      <p:sp>
+        <p:nvSpPr>
+          <p:cNvPr id="2" name="Title 1">
+            <a:extLst>
+              <a:ext uri="{FF2B5EF4-FFF2-40B4-BE49-F238E27FC236}">
+                <a16:creationId xmlns:a16="http://schemas.microsoft.com/office/drawing/2014/main" id="{D626F3D0-4EA6-01B7-DAC4-3DA199B13ED6}"/>
+              </a:ext>
+            </a:extLst>
+          </p:cNvPr>
+          <p:cNvSpPr>
+            <a:spLocks noGrp="1"/>
+          </p:cNvSpPr>
+          <p:nvPr>
+            <p:ph type="title"/>
+          </p:nvPr>
+        </p:nvSpPr>
+        <p:spPr/>
+        <p:txBody>
+          <a:bodyPr/>
+          <a:lstStyle/>
+          <a:p>
+            <a:r>
+              <a:rPr lang="en-US" dirty="0"/>
+              <a:t>&lt;table id=‘contents_2’&gt;Contents&lt;/table&gt;</a:t>
+            </a:r>
+          </a:p>
+        </p:txBody>
+      </p:sp>
+      <p:sp>
+        <p:nvSpPr>
+          <p:cNvPr id="3" name="Content Placeholder 2">
+            <a:extLst>
+              <a:ext uri="{FF2B5EF4-FFF2-40B4-BE49-F238E27FC236}">
+                <a16:creationId xmlns:a16="http://schemas.microsoft.com/office/drawing/2014/main" id="{7FAB9873-D1FD-70DC-2DEC-990F35296469}"/>
+              </a:ext>
+            </a:extLst>
+          </p:cNvPr>
+          <p:cNvSpPr>
+            <a:spLocks noGrp="1"/>
+          </p:cNvSpPr>
+          <p:nvPr>
+            <p:ph idx="1"/>
+          </p:nvPr>
+        </p:nvSpPr>
+        <p:spPr/>
+        <p:txBody>
+          <a:bodyPr>
+            <a:normAutofit fontScale="77500" lnSpcReduction="20000"/>
+          </a:bodyPr>
+          <a:lstStyle/>
+          <a:p>
+            <a:r>
+              <a:rPr lang="en-US" dirty="0"/>
+              <a:t>The $75 TCP request that never was.</a:t>
+            </a:r>
+          </a:p>
+          <a:p>
+            <a:r>
+              <a:rPr lang="en-US" dirty="0"/>
+              <a:t>Scaling Problems.</a:t>
+            </a:r>
+          </a:p>
+          <a:p>
+            <a:r>
+              <a:rPr lang="en-US" dirty="0"/>
+              <a:t>Walled Garden.</a:t>
+            </a:r>
+          </a:p>
+          <a:p>
+            <a:r>
+              <a:rPr lang="en-US" dirty="0"/>
+              <a:t>Realtime vs Non-Realtime requirements.</a:t>
+            </a:r>
+          </a:p>
+          <a:p>
+            <a:r>
+              <a:rPr lang="en-US" dirty="0"/>
+              <a:t>Proposing the Split.</a:t>
+            </a:r>
+          </a:p>
+          <a:p>
+            <a:r>
+              <a:rPr lang="en-US" dirty="0"/>
+              <a:t>Getting Management on board.</a:t>
+            </a:r>
+          </a:p>
+          <a:p>
+            <a:r>
+              <a:rPr lang="en-US" dirty="0"/>
+              <a:t>Making a Compromise.</a:t>
+            </a:r>
+          </a:p>
+          <a:p>
+            <a:r>
+              <a:rPr lang="en-US" dirty="0"/>
+              <a:t>MQTT to our favorite cloud provider (4.2.0.69:42069)</a:t>
+            </a:r>
+          </a:p>
+          <a:p>
+            <a:r>
+              <a:rPr lang="en-US" dirty="0"/>
+              <a:t>Solved? Not quite.</a:t>
+            </a:r>
+          </a:p>
+          <a:p>
+            <a:r>
+              <a:rPr lang="en-US" dirty="0"/>
+              <a:t>Safety and Security.</a:t>
+            </a:r>
+          </a:p>
+          <a:p>
+            <a:r>
+              <a:rPr lang="en-US" dirty="0"/>
+              <a:t>Targeting where you make changes.</a:t>
+            </a:r>
+          </a:p>
+          <a:p>
+            <a:r>
+              <a:rPr lang="en-US" dirty="0"/>
+              <a:t>Results.</a:t>
+            </a:r>
+          </a:p>
+          <a:p>
+            <a:pPr marL="0" indent="0">
+              <a:buNone/>
+            </a:pPr>
+            <a:endParaRPr lang="en-US" dirty="0"/>
+          </a:p>
+          <a:p>
+            <a:endParaRPr lang="en-US" dirty="0"/>
+          </a:p>
+        </p:txBody>
+      </p:sp>
+      <p:sp>
+        <p:nvSpPr>
+          <p:cNvPr id="4" name="Slide Number Placeholder 3">
+            <a:extLst>
+              <a:ext uri="{FF2B5EF4-FFF2-40B4-BE49-F238E27FC236}">
+                <a16:creationId xmlns:a16="http://schemas.microsoft.com/office/drawing/2014/main" id="{191D21B0-5B19-DBD9-6FA8-AEE5C7352A15}"/>
+              </a:ext>
+            </a:extLst>
+          </p:cNvPr>
+          <p:cNvSpPr>
+            <a:spLocks noGrp="1"/>
+          </p:cNvSpPr>
+          <p:nvPr>
+            <p:ph type="sldNum" sz="quarter" idx="4"/>
+          </p:nvPr>
+        </p:nvSpPr>
+        <p:spPr/>
+        <p:txBody>
+          <a:bodyPr/>
+          <a:lstStyle/>
+          <a:p>
+            <a:fld id="{FA19DD11-D068-0E4A-8D95-134F79C17C0A}" type="slidenum">
+              <a:rPr lang="en-US" smtClean="0"/>
+              <a:pPr/>
+              <a:t>3</a:t>
+            </a:fld>
+            <a:endParaRPr lang="en-US"/>
+          </a:p>
+        </p:txBody>
+      </p:sp>
+    </p:spTree>
+    <p:extLst>
+      <p:ext uri="{BB962C8B-B14F-4D97-AF65-F5344CB8AC3E}">
+        <p14:creationId xmlns:p14="http://schemas.microsoft.com/office/powerpoint/2010/main" val="3370753594"/>
+      </p:ext>
+    </p:extLst>
+  </p:cSld>
+  <p:clrMapOvr>
+    <a:masterClrMapping/>
+  </p:clrMapOvr>
+</p:sld>
+</file>
+
+<file path=ppt/slides/slide30.xml><?xml version="1.0" encoding="utf-8"?>
+<p:sld xmlns:a="http://schemas.openxmlformats.org/drawingml/2006/main" xmlns:r="http://schemas.openxmlformats.org/officeDocument/2006/relationships" xmlns:p="http://schemas.openxmlformats.org/presentationml/2006/main">
+  <p:cSld>
+    <p:spTree>
+      <p:nvGrpSpPr>
+        <p:cNvPr id="1" name=""/>
+        <p:cNvGrpSpPr/>
+        <p:nvPr/>
+      </p:nvGrpSpPr>
+      <p:grpSpPr>
+        <a:xfrm>
+          <a:off x="0" y="0"/>
+          <a:ext cx="0" cy="0"/>
+          <a:chOff x="0" y="0"/>
+          <a:chExt cx="0" cy="0"/>
+        </a:xfrm>
+      </p:grpSpPr>
+      <p:sp>
+        <p:nvSpPr>
+          <p:cNvPr id="2" name="Title 1">
+            <a:extLst>
+              <a:ext uri="{FF2B5EF4-FFF2-40B4-BE49-F238E27FC236}">
+                <a16:creationId xmlns:a16="http://schemas.microsoft.com/office/drawing/2014/main" id="{6F7223FD-9E43-BF8C-21C9-21BDB35A7A49}"/>
+              </a:ext>
+            </a:extLst>
+          </p:cNvPr>
+          <p:cNvSpPr>
+            <a:spLocks noGrp="1"/>
+          </p:cNvSpPr>
+          <p:nvPr>
+            <p:ph type="title"/>
+          </p:nvPr>
+        </p:nvSpPr>
+        <p:spPr/>
+        <p:txBody>
+          <a:bodyPr/>
+          <a:lstStyle/>
+          <a:p>
+            <a:r>
+              <a:rPr lang="en-US" dirty="0"/>
+              <a:t>Walled Garden</a:t>
+            </a:r>
+          </a:p>
+        </p:txBody>
+      </p:sp>
+      <p:sp>
+        <p:nvSpPr>
+          <p:cNvPr id="3" name="Content Placeholder 2">
+            <a:extLst>
+              <a:ext uri="{FF2B5EF4-FFF2-40B4-BE49-F238E27FC236}">
+                <a16:creationId xmlns:a16="http://schemas.microsoft.com/office/drawing/2014/main" id="{545F5B97-6984-3313-9395-2AAD23C7F334}"/>
+              </a:ext>
+            </a:extLst>
+          </p:cNvPr>
+          <p:cNvSpPr>
+            <a:spLocks noGrp="1"/>
+          </p:cNvSpPr>
+          <p:nvPr>
+            <p:ph idx="1"/>
+          </p:nvPr>
+        </p:nvSpPr>
+        <p:spPr/>
+        <p:txBody>
+          <a:bodyPr/>
+          <a:lstStyle/>
+          <a:p>
+            <a:r>
+              <a:rPr lang="en-US" dirty="0"/>
+              <a:t>This is why we have so little open-source.</a:t>
+            </a:r>
+          </a:p>
+        </p:txBody>
+      </p:sp>
+      <p:sp>
+        <p:nvSpPr>
+          <p:cNvPr id="4" name="Slide Number Placeholder 3">
+            <a:extLst>
+              <a:ext uri="{FF2B5EF4-FFF2-40B4-BE49-F238E27FC236}">
+                <a16:creationId xmlns:a16="http://schemas.microsoft.com/office/drawing/2014/main" id="{05827E58-5446-D464-3FA7-889A2CF3F48D}"/>
+              </a:ext>
+            </a:extLst>
+          </p:cNvPr>
+          <p:cNvSpPr>
+            <a:spLocks noGrp="1"/>
+          </p:cNvSpPr>
+          <p:nvPr>
+            <p:ph type="sldNum" sz="quarter" idx="4"/>
+          </p:nvPr>
+        </p:nvSpPr>
+        <p:spPr/>
+        <p:txBody>
+          <a:bodyPr/>
+          <a:lstStyle/>
+          <a:p>
+            <a:fld id="{FA19DD11-D068-0E4A-8D95-134F79C17C0A}" type="slidenum">
+              <a:rPr lang="en-US" smtClean="0"/>
+              <a:pPr/>
+              <a:t>30</a:t>
+            </a:fld>
+            <a:endParaRPr lang="en-US"/>
+          </a:p>
+        </p:txBody>
+      </p:sp>
+    </p:spTree>
+    <p:extLst>
+      <p:ext uri="{BB962C8B-B14F-4D97-AF65-F5344CB8AC3E}">
+        <p14:creationId xmlns:p14="http://schemas.microsoft.com/office/powerpoint/2010/main" val="1359402207"/>
+      </p:ext>
+    </p:extLst>
+  </p:cSld>
+  <p:clrMapOvr>
+    <a:masterClrMapping/>
+  </p:clrMapOvr>
+</p:sld>
+</file>
+
+<file path=ppt/slides/slide31.xml><?xml version="1.0" encoding="utf-8"?>
+<p:sld xmlns:a="http://schemas.openxmlformats.org/drawingml/2006/main" xmlns:r="http://schemas.openxmlformats.org/officeDocument/2006/relationships" xmlns:p="http://schemas.openxmlformats.org/presentationml/2006/main">
+  <p:cSld>
+    <p:spTree>
+      <p:nvGrpSpPr>
+        <p:cNvPr id="1" name=""/>
+        <p:cNvGrpSpPr/>
+        <p:nvPr/>
+      </p:nvGrpSpPr>
+      <p:grpSpPr>
+        <a:xfrm>
+          <a:off x="0" y="0"/>
+          <a:ext cx="0" cy="0"/>
+          <a:chOff x="0" y="0"/>
+          <a:chExt cx="0" cy="0"/>
+        </a:xfrm>
+      </p:grpSpPr>
+      <p:sp>
+        <p:nvSpPr>
+          <p:cNvPr id="2" name="Title 1">
+            <a:extLst>
+              <a:ext uri="{FF2B5EF4-FFF2-40B4-BE49-F238E27FC236}">
+                <a16:creationId xmlns:a16="http://schemas.microsoft.com/office/drawing/2014/main" id="{B0C23EC9-7BFD-4BD0-328F-0EA60B60AAB8}"/>
+              </a:ext>
+            </a:extLst>
+          </p:cNvPr>
+          <p:cNvSpPr>
+            <a:spLocks noGrp="1"/>
+          </p:cNvSpPr>
+          <p:nvPr>
+            <p:ph type="title"/>
+          </p:nvPr>
+        </p:nvSpPr>
+        <p:spPr/>
+        <p:txBody>
+          <a:bodyPr/>
+          <a:lstStyle/>
+          <a:p>
+            <a:r>
+              <a:rPr lang="en-US" dirty="0"/>
+              <a:t>What now?</a:t>
+            </a:r>
+          </a:p>
+        </p:txBody>
+      </p:sp>
+      <p:sp>
+        <p:nvSpPr>
+          <p:cNvPr id="3" name="Content Placeholder 2">
+            <a:extLst>
+              <a:ext uri="{FF2B5EF4-FFF2-40B4-BE49-F238E27FC236}">
+                <a16:creationId xmlns:a16="http://schemas.microsoft.com/office/drawing/2014/main" id="{D5C29C95-C08D-1E36-E14A-FB2E5EFA35B3}"/>
+              </a:ext>
+            </a:extLst>
+          </p:cNvPr>
+          <p:cNvSpPr>
+            <a:spLocks noGrp="1"/>
+          </p:cNvSpPr>
+          <p:nvPr>
+            <p:ph idx="1"/>
+          </p:nvPr>
+        </p:nvSpPr>
+        <p:spPr/>
+        <p:txBody>
+          <a:bodyPr/>
+          <a:lstStyle/>
+          <a:p>
+            <a:r>
+              <a:rPr lang="en-US" dirty="0"/>
+              <a:t>I cannot, in good faith, continue.</a:t>
+            </a:r>
+          </a:p>
+          <a:p>
+            <a:r>
+              <a:rPr lang="en-US" dirty="0"/>
+              <a:t>But this is ‘the way it’s done’. Pay Up. Shut up.</a:t>
+            </a:r>
+          </a:p>
+          <a:p>
+            <a:r>
+              <a:rPr lang="en-US" dirty="0"/>
+              <a:t>* Insert German quote here.</a:t>
+            </a:r>
+          </a:p>
+        </p:txBody>
+      </p:sp>
+      <p:sp>
+        <p:nvSpPr>
+          <p:cNvPr id="4" name="Slide Number Placeholder 3">
+            <a:extLst>
+              <a:ext uri="{FF2B5EF4-FFF2-40B4-BE49-F238E27FC236}">
+                <a16:creationId xmlns:a16="http://schemas.microsoft.com/office/drawing/2014/main" id="{8EDB0BAD-9909-CF63-CC44-356191DA6041}"/>
+              </a:ext>
+            </a:extLst>
+          </p:cNvPr>
+          <p:cNvSpPr>
+            <a:spLocks noGrp="1"/>
+          </p:cNvSpPr>
+          <p:nvPr>
+            <p:ph type="sldNum" sz="quarter" idx="4"/>
+          </p:nvPr>
+        </p:nvSpPr>
+        <p:spPr/>
+        <p:txBody>
+          <a:bodyPr/>
+          <a:lstStyle/>
+          <a:p>
+            <a:fld id="{FA19DD11-D068-0E4A-8D95-134F79C17C0A}" type="slidenum">
+              <a:rPr lang="en-US" smtClean="0"/>
+              <a:pPr/>
+              <a:t>31</a:t>
+            </a:fld>
+            <a:endParaRPr lang="en-US"/>
+          </a:p>
+        </p:txBody>
+      </p:sp>
+    </p:spTree>
+    <p:extLst>
+      <p:ext uri="{BB962C8B-B14F-4D97-AF65-F5344CB8AC3E}">
+        <p14:creationId xmlns:p14="http://schemas.microsoft.com/office/powerpoint/2010/main" val="1240334967"/>
+      </p:ext>
+    </p:extLst>
+  </p:cSld>
+  <p:clrMapOvr>
+    <a:masterClrMapping/>
+  </p:clrMapOvr>
+</p:sld>
+</file>
+
+<file path=ppt/slides/slide32.xml><?xml version="1.0" encoding="utf-8"?>
+<p:sld xmlns:a="http://schemas.openxmlformats.org/drawingml/2006/main" xmlns:r="http://schemas.openxmlformats.org/officeDocument/2006/relationships" xmlns:p="http://schemas.openxmlformats.org/presentationml/2006/main">
+  <p:cSld>
+    <p:spTree>
+      <p:nvGrpSpPr>
+        <p:cNvPr id="1" name=""/>
+        <p:cNvGrpSpPr/>
+        <p:nvPr/>
+      </p:nvGrpSpPr>
+      <p:grpSpPr>
+        <a:xfrm>
+          <a:off x="0" y="0"/>
+          <a:ext cx="0" cy="0"/>
+          <a:chOff x="0" y="0"/>
+          <a:chExt cx="0" cy="0"/>
+        </a:xfrm>
+      </p:grpSpPr>
+      <p:sp>
+        <p:nvSpPr>
+          <p:cNvPr id="2" name="Title 1">
+            <a:extLst>
+              <a:ext uri="{FF2B5EF4-FFF2-40B4-BE49-F238E27FC236}">
+                <a16:creationId xmlns:a16="http://schemas.microsoft.com/office/drawing/2014/main" id="{D0A62A6E-ECC9-75BE-47D1-F18059EDB3B1}"/>
+              </a:ext>
+            </a:extLst>
+          </p:cNvPr>
+          <p:cNvSpPr>
+            <a:spLocks noGrp="1"/>
+          </p:cNvSpPr>
+          <p:nvPr>
+            <p:ph type="title"/>
+          </p:nvPr>
+        </p:nvSpPr>
+        <p:spPr/>
+        <p:txBody>
+          <a:bodyPr/>
+          <a:lstStyle/>
+          <a:p>
+            <a:r>
+              <a:rPr lang="en-US" dirty="0"/>
+              <a:t>We need a rewrite!</a:t>
+            </a:r>
+          </a:p>
+        </p:txBody>
+      </p:sp>
+      <p:sp>
+        <p:nvSpPr>
+          <p:cNvPr id="3" name="Content Placeholder 2">
+            <a:extLst>
+              <a:ext uri="{FF2B5EF4-FFF2-40B4-BE49-F238E27FC236}">
+                <a16:creationId xmlns:a16="http://schemas.microsoft.com/office/drawing/2014/main" id="{F705FC4B-BA9E-99C0-3240-7339D095EC3B}"/>
+              </a:ext>
+            </a:extLst>
+          </p:cNvPr>
+          <p:cNvSpPr>
+            <a:spLocks noGrp="1"/>
+          </p:cNvSpPr>
+          <p:nvPr>
+            <p:ph idx="1"/>
+          </p:nvPr>
+        </p:nvSpPr>
+        <p:spPr/>
+        <p:txBody>
+          <a:bodyPr/>
+          <a:lstStyle/>
+          <a:p>
+            <a:r>
+              <a:rPr lang="en-US" dirty="0"/>
+              <a:t>No you don’t*</a:t>
+            </a:r>
+          </a:p>
+          <a:p>
+            <a:r>
+              <a:rPr lang="en-US" dirty="0"/>
+              <a:t>You need to rewrite a part of this. But where?</a:t>
+            </a:r>
+          </a:p>
+          <a:p>
+            <a:endParaRPr lang="en-US" dirty="0"/>
+          </a:p>
+          <a:p>
+            <a:r>
+              <a:rPr lang="en-US" dirty="0"/>
+              <a:t>*unless you’re windows 11</a:t>
+            </a:r>
+          </a:p>
+        </p:txBody>
+      </p:sp>
+      <p:sp>
+        <p:nvSpPr>
+          <p:cNvPr id="4" name="Slide Number Placeholder 3">
+            <a:extLst>
+              <a:ext uri="{FF2B5EF4-FFF2-40B4-BE49-F238E27FC236}">
+                <a16:creationId xmlns:a16="http://schemas.microsoft.com/office/drawing/2014/main" id="{6B583B76-4454-C6C3-4DC2-27B549ECA5E7}"/>
+              </a:ext>
+            </a:extLst>
+          </p:cNvPr>
+          <p:cNvSpPr>
+            <a:spLocks noGrp="1"/>
+          </p:cNvSpPr>
+          <p:nvPr>
+            <p:ph type="sldNum" sz="quarter" idx="4"/>
+          </p:nvPr>
+        </p:nvSpPr>
+        <p:spPr/>
+        <p:txBody>
+          <a:bodyPr/>
+          <a:lstStyle/>
+          <a:p>
+            <a:fld id="{FA19DD11-D068-0E4A-8D95-134F79C17C0A}" type="slidenum">
+              <a:rPr lang="en-US" smtClean="0"/>
+              <a:pPr/>
+              <a:t>32</a:t>
+            </a:fld>
+            <a:endParaRPr lang="en-US"/>
+          </a:p>
+        </p:txBody>
+      </p:sp>
+    </p:spTree>
+    <p:extLst>
+      <p:ext uri="{BB962C8B-B14F-4D97-AF65-F5344CB8AC3E}">
+        <p14:creationId xmlns:p14="http://schemas.microsoft.com/office/powerpoint/2010/main" val="268204845"/>
+      </p:ext>
+    </p:extLst>
+  </p:cSld>
+  <p:clrMapOvr>
+    <a:masterClrMapping/>
+  </p:clrMapOvr>
+</p:sld>
+</file>
+
+<file path=ppt/slides/slide33.xml><?xml version="1.0" encoding="utf-8"?>
+<p:sld xmlns:a="http://schemas.openxmlformats.org/drawingml/2006/main" xmlns:r="http://schemas.openxmlformats.org/officeDocument/2006/relationships" xmlns:p="http://schemas.openxmlformats.org/presentationml/2006/main">
+  <p:cSld>
+    <p:spTree>
+      <p:nvGrpSpPr>
+        <p:cNvPr id="1" name=""/>
+        <p:cNvGrpSpPr/>
+        <p:nvPr/>
+      </p:nvGrpSpPr>
+      <p:grpSpPr>
+        <a:xfrm>
+          <a:off x="0" y="0"/>
+          <a:ext cx="0" cy="0"/>
+          <a:chOff x="0" y="0"/>
+          <a:chExt cx="0" cy="0"/>
+        </a:xfrm>
+      </p:grpSpPr>
+      <p:sp>
+        <p:nvSpPr>
+          <p:cNvPr id="2" name="Title 1">
+            <a:extLst>
+              <a:ext uri="{FF2B5EF4-FFF2-40B4-BE49-F238E27FC236}">
+                <a16:creationId xmlns:a16="http://schemas.microsoft.com/office/drawing/2014/main" id="{5FF8F787-5AA6-7FE4-B251-1B86C423151A}"/>
+              </a:ext>
+            </a:extLst>
+          </p:cNvPr>
+          <p:cNvSpPr>
+            <a:spLocks noGrp="1"/>
+          </p:cNvSpPr>
+          <p:nvPr>
+            <p:ph type="title"/>
+          </p:nvPr>
+        </p:nvSpPr>
+        <p:spPr/>
+        <p:txBody>
+          <a:bodyPr/>
+          <a:lstStyle/>
+          <a:p>
+            <a:r>
+              <a:rPr lang="en-US" dirty="0"/>
+              <a:t>What do we rewrite?</a:t>
+            </a:r>
+          </a:p>
+        </p:txBody>
+      </p:sp>
+      <p:sp>
+        <p:nvSpPr>
+          <p:cNvPr id="3" name="Content Placeholder 2">
+            <a:extLst>
+              <a:ext uri="{FF2B5EF4-FFF2-40B4-BE49-F238E27FC236}">
+                <a16:creationId xmlns:a16="http://schemas.microsoft.com/office/drawing/2014/main" id="{36A5A2E0-3B7B-C1CA-8417-67C7999B27E9}"/>
+              </a:ext>
+            </a:extLst>
+          </p:cNvPr>
+          <p:cNvSpPr>
+            <a:spLocks noGrp="1"/>
+          </p:cNvSpPr>
+          <p:nvPr>
+            <p:ph idx="1"/>
+          </p:nvPr>
+        </p:nvSpPr>
+        <p:spPr/>
+        <p:txBody>
+          <a:bodyPr/>
+          <a:lstStyle/>
+          <a:p>
+            <a:r>
+              <a:rPr lang="en-US" dirty="0"/>
+              <a:t>We can’t put everything on commodity hardware.</a:t>
+            </a:r>
+          </a:p>
+          <a:p>
+            <a:r>
+              <a:rPr lang="en-US" dirty="0"/>
+              <a:t>We still need the Realtime control, But only for hardware IO</a:t>
+            </a:r>
+          </a:p>
+          <a:p>
+            <a:endParaRPr lang="en-US" dirty="0"/>
+          </a:p>
+        </p:txBody>
+      </p:sp>
+      <p:sp>
+        <p:nvSpPr>
+          <p:cNvPr id="4" name="Slide Number Placeholder 3">
+            <a:extLst>
+              <a:ext uri="{FF2B5EF4-FFF2-40B4-BE49-F238E27FC236}">
+                <a16:creationId xmlns:a16="http://schemas.microsoft.com/office/drawing/2014/main" id="{BD35F2DD-3421-F173-CFE4-6A1397972F02}"/>
+              </a:ext>
+            </a:extLst>
+          </p:cNvPr>
+          <p:cNvSpPr>
+            <a:spLocks noGrp="1"/>
+          </p:cNvSpPr>
+          <p:nvPr>
+            <p:ph type="sldNum" sz="quarter" idx="4"/>
+          </p:nvPr>
+        </p:nvSpPr>
+        <p:spPr/>
+        <p:txBody>
+          <a:bodyPr/>
+          <a:lstStyle/>
+          <a:p>
+            <a:fld id="{FA19DD11-D068-0E4A-8D95-134F79C17C0A}" type="slidenum">
+              <a:rPr lang="en-US" smtClean="0"/>
+              <a:pPr/>
+              <a:t>33</a:t>
+            </a:fld>
+            <a:endParaRPr lang="en-US"/>
+          </a:p>
+        </p:txBody>
+      </p:sp>
+    </p:spTree>
+    <p:extLst>
+      <p:ext uri="{BB962C8B-B14F-4D97-AF65-F5344CB8AC3E}">
+        <p14:creationId xmlns:p14="http://schemas.microsoft.com/office/powerpoint/2010/main" val="2136760570"/>
+      </p:ext>
+    </p:extLst>
+  </p:cSld>
+  <p:clrMapOvr>
+    <a:masterClrMapping/>
+  </p:clrMapOvr>
+</p:sld>
+</file>
+
+<file path=ppt/slides/slide34.xml><?xml version="1.0" encoding="utf-8"?>
+<p:sld xmlns:a="http://schemas.openxmlformats.org/drawingml/2006/main" xmlns:r="http://schemas.openxmlformats.org/officeDocument/2006/relationships" xmlns:p="http://schemas.openxmlformats.org/presentationml/2006/main">
+  <p:cSld>
+    <p:spTree>
+      <p:nvGrpSpPr>
+        <p:cNvPr id="1" name=""/>
+        <p:cNvGrpSpPr/>
+        <p:nvPr/>
+      </p:nvGrpSpPr>
+      <p:grpSpPr>
+        <a:xfrm>
+          <a:off x="0" y="0"/>
+          <a:ext cx="0" cy="0"/>
+          <a:chOff x="0" y="0"/>
+          <a:chExt cx="0" cy="0"/>
+        </a:xfrm>
+      </p:grpSpPr>
+      <p:sp>
+        <p:nvSpPr>
+          <p:cNvPr id="2" name="Title 1">
+            <a:extLst>
+              <a:ext uri="{FF2B5EF4-FFF2-40B4-BE49-F238E27FC236}">
+                <a16:creationId xmlns:a16="http://schemas.microsoft.com/office/drawing/2014/main" id="{D70C82D6-F56E-7CE2-86E6-7B0495864CB2}"/>
+              </a:ext>
+            </a:extLst>
+          </p:cNvPr>
+          <p:cNvSpPr>
+            <a:spLocks noGrp="1"/>
+          </p:cNvSpPr>
+          <p:nvPr>
+            <p:ph type="title"/>
+          </p:nvPr>
+        </p:nvSpPr>
+        <p:spPr/>
+        <p:txBody>
+          <a:bodyPr/>
+          <a:lstStyle/>
+          <a:p>
+            <a:r>
+              <a:rPr lang="en-US" dirty="0"/>
+              <a:t>How to Justify this?</a:t>
+            </a:r>
+          </a:p>
+        </p:txBody>
+      </p:sp>
+      <p:sp>
+        <p:nvSpPr>
+          <p:cNvPr id="3" name="Content Placeholder 2">
+            <a:extLst>
+              <a:ext uri="{FF2B5EF4-FFF2-40B4-BE49-F238E27FC236}">
+                <a16:creationId xmlns:a16="http://schemas.microsoft.com/office/drawing/2014/main" id="{DA5064FA-FD05-7A9C-D961-AB6DA77545B6}"/>
+              </a:ext>
+            </a:extLst>
+          </p:cNvPr>
+          <p:cNvSpPr>
+            <a:spLocks noGrp="1"/>
+          </p:cNvSpPr>
+          <p:nvPr>
+            <p:ph idx="1"/>
+          </p:nvPr>
+        </p:nvSpPr>
+        <p:spPr/>
+        <p:txBody>
+          <a:bodyPr/>
+          <a:lstStyle/>
+          <a:p>
+            <a:r>
+              <a:rPr lang="en-US" dirty="0"/>
+              <a:t>Use money. Managers speak that language.</a:t>
+            </a:r>
+          </a:p>
+          <a:p>
+            <a:r>
+              <a:rPr lang="en-US" dirty="0" err="1"/>
+              <a:t>CapEx</a:t>
+            </a:r>
+            <a:r>
+              <a:rPr lang="en-US" dirty="0"/>
+              <a:t> cost per unit.</a:t>
+            </a:r>
+          </a:p>
+          <a:p>
+            <a:r>
+              <a:rPr lang="en-US" dirty="0"/>
+              <a:t>Reinventing (Many) wheels.</a:t>
+            </a:r>
+          </a:p>
+          <a:p>
+            <a:r>
+              <a:rPr lang="en-US" dirty="0"/>
+              <a:t>Skills Shortage.</a:t>
+            </a:r>
+          </a:p>
+          <a:p>
+            <a:r>
+              <a:rPr lang="en-US" dirty="0"/>
+              <a:t>Don’t block critical path.</a:t>
+            </a:r>
+          </a:p>
+        </p:txBody>
+      </p:sp>
+      <p:sp>
+        <p:nvSpPr>
+          <p:cNvPr id="4" name="Slide Number Placeholder 3">
+            <a:extLst>
+              <a:ext uri="{FF2B5EF4-FFF2-40B4-BE49-F238E27FC236}">
+                <a16:creationId xmlns:a16="http://schemas.microsoft.com/office/drawing/2014/main" id="{E4ECFCF9-061B-A929-422F-4AD93E4B24B7}"/>
+              </a:ext>
+            </a:extLst>
+          </p:cNvPr>
+          <p:cNvSpPr>
+            <a:spLocks noGrp="1"/>
+          </p:cNvSpPr>
+          <p:nvPr>
+            <p:ph type="sldNum" sz="quarter" idx="4"/>
+          </p:nvPr>
+        </p:nvSpPr>
+        <p:spPr/>
+        <p:txBody>
+          <a:bodyPr/>
+          <a:lstStyle/>
+          <a:p>
+            <a:fld id="{FA19DD11-D068-0E4A-8D95-134F79C17C0A}" type="slidenum">
+              <a:rPr lang="en-US" smtClean="0"/>
+              <a:pPr/>
+              <a:t>34</a:t>
+            </a:fld>
+            <a:endParaRPr lang="en-US"/>
+          </a:p>
+        </p:txBody>
+      </p:sp>
+    </p:spTree>
+    <p:extLst>
+      <p:ext uri="{BB962C8B-B14F-4D97-AF65-F5344CB8AC3E}">
+        <p14:creationId xmlns:p14="http://schemas.microsoft.com/office/powerpoint/2010/main" val="1052882560"/>
+      </p:ext>
+    </p:extLst>
+  </p:cSld>
+  <p:clrMapOvr>
+    <a:masterClrMapping/>
+  </p:clrMapOvr>
+</p:sld>
+</file>
+
+<file path=ppt/slides/slide35.xml><?xml version="1.0" encoding="utf-8"?>
+<p:sld xmlns:a="http://schemas.openxmlformats.org/drawingml/2006/main" xmlns:r="http://schemas.openxmlformats.org/officeDocument/2006/relationships" xmlns:p="http://schemas.openxmlformats.org/presentationml/2006/main">
+  <p:cSld>
+    <p:spTree>
+      <p:nvGrpSpPr>
+        <p:cNvPr id="1" name=""/>
+        <p:cNvGrpSpPr/>
+        <p:nvPr/>
+      </p:nvGrpSpPr>
+      <p:grpSpPr>
+        <a:xfrm>
+          <a:off x="0" y="0"/>
+          <a:ext cx="0" cy="0"/>
+          <a:chOff x="0" y="0"/>
+          <a:chExt cx="0" cy="0"/>
+        </a:xfrm>
+      </p:grpSpPr>
+      <p:sp>
+        <p:nvSpPr>
+          <p:cNvPr id="2" name="Title 1">
+            <a:extLst>
+              <a:ext uri="{FF2B5EF4-FFF2-40B4-BE49-F238E27FC236}">
+                <a16:creationId xmlns:a16="http://schemas.microsoft.com/office/drawing/2014/main" id="{5277FA71-9168-74CB-C320-73337A496F2C}"/>
+              </a:ext>
+            </a:extLst>
+          </p:cNvPr>
+          <p:cNvSpPr>
+            <a:spLocks noGrp="1"/>
+          </p:cNvSpPr>
+          <p:nvPr>
+            <p:ph type="title"/>
+          </p:nvPr>
+        </p:nvSpPr>
+        <p:spPr/>
+        <p:txBody>
+          <a:bodyPr/>
+          <a:lstStyle/>
+          <a:p>
+            <a:r>
+              <a:rPr lang="en-US" dirty="0"/>
+              <a:t>Justification</a:t>
+            </a:r>
+          </a:p>
+        </p:txBody>
+      </p:sp>
+      <p:sp>
+        <p:nvSpPr>
+          <p:cNvPr id="3" name="Content Placeholder 2">
+            <a:extLst>
+              <a:ext uri="{FF2B5EF4-FFF2-40B4-BE49-F238E27FC236}">
+                <a16:creationId xmlns:a16="http://schemas.microsoft.com/office/drawing/2014/main" id="{4278BA08-01AD-E0E0-192E-DD7ECEF26911}"/>
+              </a:ext>
+            </a:extLst>
+          </p:cNvPr>
+          <p:cNvSpPr>
+            <a:spLocks noGrp="1"/>
+          </p:cNvSpPr>
+          <p:nvPr>
+            <p:ph idx="1"/>
+          </p:nvPr>
+        </p:nvSpPr>
+        <p:spPr/>
+        <p:txBody>
+          <a:bodyPr/>
+          <a:lstStyle/>
+          <a:p>
+            <a:r>
+              <a:rPr lang="en-US" dirty="0"/>
+              <a:t>We had a working, just very flimsy version.</a:t>
+            </a:r>
+          </a:p>
+          <a:p>
+            <a:r>
+              <a:rPr lang="en-US" dirty="0"/>
+              <a:t>Use this for hardware testing.</a:t>
+            </a:r>
+          </a:p>
+          <a:p>
+            <a:r>
+              <a:rPr lang="en-US" dirty="0"/>
+              <a:t>Skills Development.</a:t>
+            </a:r>
+          </a:p>
+        </p:txBody>
+      </p:sp>
+      <p:sp>
+        <p:nvSpPr>
+          <p:cNvPr id="4" name="Slide Number Placeholder 3">
+            <a:extLst>
+              <a:ext uri="{FF2B5EF4-FFF2-40B4-BE49-F238E27FC236}">
+                <a16:creationId xmlns:a16="http://schemas.microsoft.com/office/drawing/2014/main" id="{F533797A-7FE0-ABCD-6A62-2810DB280831}"/>
+              </a:ext>
+            </a:extLst>
+          </p:cNvPr>
+          <p:cNvSpPr>
+            <a:spLocks noGrp="1"/>
+          </p:cNvSpPr>
+          <p:nvPr>
+            <p:ph type="sldNum" sz="quarter" idx="4"/>
+          </p:nvPr>
+        </p:nvSpPr>
+        <p:spPr/>
+        <p:txBody>
+          <a:bodyPr/>
+          <a:lstStyle/>
+          <a:p>
+            <a:fld id="{FA19DD11-D068-0E4A-8D95-134F79C17C0A}" type="slidenum">
+              <a:rPr lang="en-US" smtClean="0"/>
+              <a:pPr/>
+              <a:t>35</a:t>
+            </a:fld>
+            <a:endParaRPr lang="en-US"/>
+          </a:p>
+        </p:txBody>
+      </p:sp>
+    </p:spTree>
+    <p:extLst>
+      <p:ext uri="{BB962C8B-B14F-4D97-AF65-F5344CB8AC3E}">
+        <p14:creationId xmlns:p14="http://schemas.microsoft.com/office/powerpoint/2010/main" val="754549874"/>
+      </p:ext>
+    </p:extLst>
+  </p:cSld>
+  <p:clrMapOvr>
+    <a:masterClrMapping/>
+  </p:clrMapOvr>
+</p:sld>
+</file>
+
+<file path=ppt/slides/slide36.xml><?xml version="1.0" encoding="utf-8"?>
+<p:sld xmlns:a="http://schemas.openxmlformats.org/drawingml/2006/main" xmlns:r="http://schemas.openxmlformats.org/officeDocument/2006/relationships" xmlns:p="http://schemas.openxmlformats.org/presentationml/2006/main">
+  <p:cSld>
+    <p:spTree>
+      <p:nvGrpSpPr>
+        <p:cNvPr id="1" name=""/>
+        <p:cNvGrpSpPr/>
+        <p:nvPr/>
+      </p:nvGrpSpPr>
+      <p:grpSpPr>
+        <a:xfrm>
+          <a:off x="0" y="0"/>
+          <a:ext cx="0" cy="0"/>
+          <a:chOff x="0" y="0"/>
+          <a:chExt cx="0" cy="0"/>
+        </a:xfrm>
+      </p:grpSpPr>
+      <p:sp>
+        <p:nvSpPr>
+          <p:cNvPr id="2" name="Title 1">
+            <a:extLst>
+              <a:ext uri="{FF2B5EF4-FFF2-40B4-BE49-F238E27FC236}">
+                <a16:creationId xmlns:a16="http://schemas.microsoft.com/office/drawing/2014/main" id="{A0505F2B-7A3B-013D-697A-D9C788C14CA4}"/>
+              </a:ext>
+            </a:extLst>
+          </p:cNvPr>
+          <p:cNvSpPr>
+            <a:spLocks noGrp="1"/>
+          </p:cNvSpPr>
+          <p:nvPr>
+            <p:ph type="title"/>
+          </p:nvPr>
+        </p:nvSpPr>
+        <p:spPr/>
+        <p:txBody>
+          <a:bodyPr/>
+          <a:lstStyle/>
+          <a:p>
+            <a:r>
+              <a:rPr lang="en-US" dirty="0"/>
+              <a:t>Who is going to do this?</a:t>
+            </a:r>
+          </a:p>
+        </p:txBody>
+      </p:sp>
+      <p:sp>
+        <p:nvSpPr>
+          <p:cNvPr id="3" name="Content Placeholder 2">
+            <a:extLst>
+              <a:ext uri="{FF2B5EF4-FFF2-40B4-BE49-F238E27FC236}">
+                <a16:creationId xmlns:a16="http://schemas.microsoft.com/office/drawing/2014/main" id="{05976D1D-89A7-D23C-4CC4-9A3E7D693F8F}"/>
+              </a:ext>
+            </a:extLst>
+          </p:cNvPr>
+          <p:cNvSpPr>
+            <a:spLocks noGrp="1"/>
+          </p:cNvSpPr>
+          <p:nvPr>
+            <p:ph idx="1"/>
+          </p:nvPr>
+        </p:nvSpPr>
+        <p:spPr/>
+        <p:txBody>
+          <a:bodyPr/>
+          <a:lstStyle/>
+          <a:p>
+            <a:r>
+              <a:rPr lang="en-US" dirty="0"/>
+              <a:t>Us, of course.</a:t>
+            </a:r>
+          </a:p>
+          <a:p>
+            <a:r>
+              <a:rPr lang="en-US" dirty="0"/>
+              <a:t>Us, two juniors and a web-scale developer with zero experience</a:t>
+            </a:r>
+          </a:p>
+          <a:p>
+            <a:endParaRPr lang="en-US" dirty="0"/>
+          </a:p>
+        </p:txBody>
+      </p:sp>
+      <p:sp>
+        <p:nvSpPr>
+          <p:cNvPr id="4" name="Slide Number Placeholder 3">
+            <a:extLst>
+              <a:ext uri="{FF2B5EF4-FFF2-40B4-BE49-F238E27FC236}">
+                <a16:creationId xmlns:a16="http://schemas.microsoft.com/office/drawing/2014/main" id="{7BB36477-70E1-C3CC-12F8-F674A345046E}"/>
+              </a:ext>
+            </a:extLst>
+          </p:cNvPr>
+          <p:cNvSpPr>
+            <a:spLocks noGrp="1"/>
+          </p:cNvSpPr>
+          <p:nvPr>
+            <p:ph type="sldNum" sz="quarter" idx="4"/>
+          </p:nvPr>
+        </p:nvSpPr>
+        <p:spPr/>
+        <p:txBody>
+          <a:bodyPr/>
+          <a:lstStyle/>
+          <a:p>
+            <a:fld id="{FA19DD11-D068-0E4A-8D95-134F79C17C0A}" type="slidenum">
+              <a:rPr lang="en-US" smtClean="0"/>
+              <a:pPr/>
+              <a:t>36</a:t>
+            </a:fld>
+            <a:endParaRPr lang="en-US"/>
+          </a:p>
+        </p:txBody>
+      </p:sp>
+    </p:spTree>
+    <p:extLst>
+      <p:ext uri="{BB962C8B-B14F-4D97-AF65-F5344CB8AC3E}">
+        <p14:creationId xmlns:p14="http://schemas.microsoft.com/office/powerpoint/2010/main" val="2191422997"/>
+      </p:ext>
+    </p:extLst>
+  </p:cSld>
+  <p:clrMapOvr>
+    <a:masterClrMapping/>
+  </p:clrMapOvr>
+</p:sld>
+</file>
+
+<file path=ppt/slides/slide37.xml><?xml version="1.0" encoding="utf-8"?>
+<p:sld xmlns:a="http://schemas.openxmlformats.org/drawingml/2006/main" xmlns:r="http://schemas.openxmlformats.org/officeDocument/2006/relationships" xmlns:p="http://schemas.openxmlformats.org/presentationml/2006/main">
+  <p:cSld>
+    <p:spTree>
+      <p:nvGrpSpPr>
+        <p:cNvPr id="1" name=""/>
+        <p:cNvGrpSpPr/>
+        <p:nvPr/>
+      </p:nvGrpSpPr>
+      <p:grpSpPr>
+        <a:xfrm>
+          <a:off x="0" y="0"/>
+          <a:ext cx="0" cy="0"/>
+          <a:chOff x="0" y="0"/>
+          <a:chExt cx="0" cy="0"/>
+        </a:xfrm>
+      </p:grpSpPr>
+      <p:sp>
+        <p:nvSpPr>
+          <p:cNvPr id="2" name="Title 1">
+            <a:extLst>
+              <a:ext uri="{FF2B5EF4-FFF2-40B4-BE49-F238E27FC236}">
+                <a16:creationId xmlns:a16="http://schemas.microsoft.com/office/drawing/2014/main" id="{F6CE1205-DC55-5E58-B168-1506A651A76C}"/>
+              </a:ext>
+            </a:extLst>
+          </p:cNvPr>
+          <p:cNvSpPr>
+            <a:spLocks noGrp="1"/>
+          </p:cNvSpPr>
+          <p:nvPr>
+            <p:ph type="title"/>
+          </p:nvPr>
+        </p:nvSpPr>
+        <p:spPr/>
+        <p:txBody>
+          <a:bodyPr/>
+          <a:lstStyle/>
+          <a:p>
+            <a:r>
+              <a:rPr lang="en-US" dirty="0"/>
+              <a:t>Hello Dunning-Kruger my old friend</a:t>
+            </a:r>
+          </a:p>
+        </p:txBody>
+      </p:sp>
+      <p:sp>
+        <p:nvSpPr>
+          <p:cNvPr id="3" name="Content Placeholder 2">
+            <a:extLst>
+              <a:ext uri="{FF2B5EF4-FFF2-40B4-BE49-F238E27FC236}">
+                <a16:creationId xmlns:a16="http://schemas.microsoft.com/office/drawing/2014/main" id="{89E9FA87-BDB9-7F0C-CA7D-2DED9CB1E24C}"/>
+              </a:ext>
+            </a:extLst>
+          </p:cNvPr>
+          <p:cNvSpPr>
+            <a:spLocks noGrp="1"/>
+          </p:cNvSpPr>
+          <p:nvPr>
+            <p:ph idx="1"/>
+          </p:nvPr>
+        </p:nvSpPr>
+        <p:spPr/>
+        <p:txBody>
+          <a:bodyPr/>
+          <a:lstStyle/>
+          <a:p>
+            <a:r>
+              <a:rPr lang="en-US" dirty="0"/>
+              <a:t>I first estimated we could do this in about 3 months.</a:t>
+            </a:r>
+          </a:p>
+          <a:p>
+            <a:r>
+              <a:rPr lang="en-US" dirty="0"/>
+              <a:t>Our first working alternative took about 6… oops.</a:t>
+            </a:r>
+          </a:p>
+          <a:p>
+            <a:endParaRPr lang="en-US" dirty="0"/>
+          </a:p>
+        </p:txBody>
+      </p:sp>
+      <p:sp>
+        <p:nvSpPr>
+          <p:cNvPr id="4" name="Slide Number Placeholder 3">
+            <a:extLst>
+              <a:ext uri="{FF2B5EF4-FFF2-40B4-BE49-F238E27FC236}">
+                <a16:creationId xmlns:a16="http://schemas.microsoft.com/office/drawing/2014/main" id="{E3D13CBB-D76E-3B7C-D75C-C731C5EA9B67}"/>
+              </a:ext>
+            </a:extLst>
+          </p:cNvPr>
+          <p:cNvSpPr>
+            <a:spLocks noGrp="1"/>
+          </p:cNvSpPr>
+          <p:nvPr>
+            <p:ph type="sldNum" sz="quarter" idx="4"/>
+          </p:nvPr>
+        </p:nvSpPr>
+        <p:spPr/>
+        <p:txBody>
+          <a:bodyPr/>
+          <a:lstStyle/>
+          <a:p>
+            <a:fld id="{FA19DD11-D068-0E4A-8D95-134F79C17C0A}" type="slidenum">
+              <a:rPr lang="en-US" smtClean="0"/>
+              <a:pPr/>
+              <a:t>37</a:t>
+            </a:fld>
+            <a:endParaRPr lang="en-US"/>
+          </a:p>
+        </p:txBody>
+      </p:sp>
+    </p:spTree>
+    <p:extLst>
+      <p:ext uri="{BB962C8B-B14F-4D97-AF65-F5344CB8AC3E}">
+        <p14:creationId xmlns:p14="http://schemas.microsoft.com/office/powerpoint/2010/main" val="2515686844"/>
+      </p:ext>
+    </p:extLst>
+  </p:cSld>
+  <p:clrMapOvr>
+    <a:masterClrMapping/>
+  </p:clrMapOvr>
+</p:sld>
+</file>
+
+<file path=ppt/slides/slide38.xml><?xml version="1.0" encoding="utf-8"?>
+<p:sld xmlns:a="http://schemas.openxmlformats.org/drawingml/2006/main" xmlns:r="http://schemas.openxmlformats.org/officeDocument/2006/relationships" xmlns:p="http://schemas.openxmlformats.org/presentationml/2006/main">
+  <p:cSld>
+    <p:spTree>
+      <p:nvGrpSpPr>
+        <p:cNvPr id="1" name=""/>
+        <p:cNvGrpSpPr/>
+        <p:nvPr/>
+      </p:nvGrpSpPr>
+      <p:grpSpPr>
+        <a:xfrm>
+          <a:off x="0" y="0"/>
+          <a:ext cx="0" cy="0"/>
+          <a:chOff x="0" y="0"/>
+          <a:chExt cx="0" cy="0"/>
+        </a:xfrm>
+      </p:grpSpPr>
+      <p:sp>
+        <p:nvSpPr>
+          <p:cNvPr id="2" name="Title 1">
+            <a:extLst>
+              <a:ext uri="{FF2B5EF4-FFF2-40B4-BE49-F238E27FC236}">
+                <a16:creationId xmlns:a16="http://schemas.microsoft.com/office/drawing/2014/main" id="{A7057308-AAB6-B706-E507-2B0C0135E33A}"/>
+              </a:ext>
+            </a:extLst>
+          </p:cNvPr>
+          <p:cNvSpPr>
+            <a:spLocks noGrp="1"/>
+          </p:cNvSpPr>
+          <p:nvPr>
+            <p:ph type="title"/>
+          </p:nvPr>
+        </p:nvSpPr>
+        <p:spPr/>
+        <p:txBody>
+          <a:bodyPr/>
+          <a:lstStyle/>
+          <a:p>
+            <a:r>
+              <a:rPr lang="en-US" dirty="0"/>
+              <a:t>Picture of Dunning Kruger</a:t>
+            </a:r>
+          </a:p>
+        </p:txBody>
+      </p:sp>
+      <p:sp>
+        <p:nvSpPr>
+          <p:cNvPr id="3" name="Content Placeholder 2">
+            <a:extLst>
+              <a:ext uri="{FF2B5EF4-FFF2-40B4-BE49-F238E27FC236}">
+                <a16:creationId xmlns:a16="http://schemas.microsoft.com/office/drawing/2014/main" id="{0087FC50-5B72-215F-E68B-D183CE69E1A7}"/>
+              </a:ext>
+            </a:extLst>
+          </p:cNvPr>
+          <p:cNvSpPr>
+            <a:spLocks noGrp="1"/>
+          </p:cNvSpPr>
+          <p:nvPr>
+            <p:ph idx="1"/>
+          </p:nvPr>
+        </p:nvSpPr>
+        <p:spPr/>
+        <p:txBody>
+          <a:bodyPr/>
+          <a:lstStyle/>
+          <a:p>
+            <a:endParaRPr lang="en-US"/>
+          </a:p>
+        </p:txBody>
+      </p:sp>
+      <p:sp>
+        <p:nvSpPr>
+          <p:cNvPr id="4" name="Slide Number Placeholder 3">
+            <a:extLst>
+              <a:ext uri="{FF2B5EF4-FFF2-40B4-BE49-F238E27FC236}">
+                <a16:creationId xmlns:a16="http://schemas.microsoft.com/office/drawing/2014/main" id="{E8075010-D41E-B058-3692-697569E7CDD6}"/>
+              </a:ext>
+            </a:extLst>
+          </p:cNvPr>
+          <p:cNvSpPr>
+            <a:spLocks noGrp="1"/>
+          </p:cNvSpPr>
+          <p:nvPr>
+            <p:ph type="sldNum" sz="quarter" idx="4"/>
+          </p:nvPr>
+        </p:nvSpPr>
+        <p:spPr/>
+        <p:txBody>
+          <a:bodyPr/>
+          <a:lstStyle/>
+          <a:p>
+            <a:fld id="{FA19DD11-D068-0E4A-8D95-134F79C17C0A}" type="slidenum">
+              <a:rPr lang="en-US" smtClean="0"/>
+              <a:pPr/>
+              <a:t>38</a:t>
+            </a:fld>
+            <a:endParaRPr lang="en-US"/>
+          </a:p>
+        </p:txBody>
+      </p:sp>
+    </p:spTree>
+    <p:extLst>
+      <p:ext uri="{BB962C8B-B14F-4D97-AF65-F5344CB8AC3E}">
+        <p14:creationId xmlns:p14="http://schemas.microsoft.com/office/powerpoint/2010/main" val="789412216"/>
+      </p:ext>
+    </p:extLst>
+  </p:cSld>
+  <p:clrMapOvr>
+    <a:masterClrMapping/>
+  </p:clrMapOvr>
+</p:sld>
+</file>
+
+<file path=ppt/slides/slide4.xml><?xml version="1.0" encoding="utf-8"?>
+<p:sld xmlns:a="http://schemas.openxmlformats.org/drawingml/2006/main" xmlns:r="http://schemas.openxmlformats.org/officeDocument/2006/relationships" xmlns:p="http://schemas.openxmlformats.org/presentationml/2006/main">
+  <p:cSld>
+    <p:spTree>
+      <p:nvGrpSpPr>
+        <p:cNvPr id="1" name=""/>
+        <p:cNvGrpSpPr/>
+        <p:nvPr/>
+      </p:nvGrpSpPr>
+      <p:grpSpPr>
+        <a:xfrm>
+          <a:off x="0" y="0"/>
+          <a:ext cx="0" cy="0"/>
+          <a:chOff x="0" y="0"/>
+          <a:chExt cx="0" cy="0"/>
+        </a:xfrm>
+      </p:grpSpPr>
+      <p:sp>
+        <p:nvSpPr>
+          <p:cNvPr id="2" name="Title 1">
+            <a:extLst>
+              <a:ext uri="{FF2B5EF4-FFF2-40B4-BE49-F238E27FC236}">
+                <a16:creationId xmlns:a16="http://schemas.microsoft.com/office/drawing/2014/main" id="{CE1D51D7-855E-9391-0F5B-F963A86AC163}"/>
+              </a:ext>
+            </a:extLst>
+          </p:cNvPr>
+          <p:cNvSpPr>
+            <a:spLocks noGrp="1"/>
+          </p:cNvSpPr>
+          <p:nvPr>
+            <p:ph type="title"/>
+          </p:nvPr>
+        </p:nvSpPr>
+        <p:spPr/>
+        <p:txBody>
+          <a:bodyPr/>
+          <a:lstStyle/>
+          <a:p>
+            <a:r>
+              <a:rPr lang="en-US" dirty="0"/>
+              <a:t>&lt;table id =‘</a:t>
+            </a:r>
+            <a:r>
+              <a:rPr lang="en-US" dirty="0" err="1"/>
+              <a:t>table_iii</a:t>
+            </a:r>
+            <a:r>
+              <a:rPr lang="en-US" dirty="0"/>
+              <a:t>&gt;Contents&lt;/table&gt;</a:t>
+            </a:r>
+          </a:p>
+        </p:txBody>
+      </p:sp>
+      <p:sp>
+        <p:nvSpPr>
+          <p:cNvPr id="3" name="Content Placeholder 2">
+            <a:extLst>
+              <a:ext uri="{FF2B5EF4-FFF2-40B4-BE49-F238E27FC236}">
+                <a16:creationId xmlns:a16="http://schemas.microsoft.com/office/drawing/2014/main" id="{0D4CFA70-6387-19AD-0800-461085660FD8}"/>
+              </a:ext>
+            </a:extLst>
+          </p:cNvPr>
+          <p:cNvSpPr>
+            <a:spLocks noGrp="1"/>
+          </p:cNvSpPr>
+          <p:nvPr>
+            <p:ph idx="1"/>
+          </p:nvPr>
+        </p:nvSpPr>
+        <p:spPr/>
+        <p:txBody>
+          <a:bodyPr/>
+          <a:lstStyle/>
+          <a:p>
+            <a:r>
+              <a:rPr lang="en-US" dirty="0"/>
+              <a:t>But we still have a problem</a:t>
+            </a:r>
+          </a:p>
+          <a:p>
+            <a:r>
+              <a:rPr lang="en-US" dirty="0"/>
+              <a:t>PLCs built for the modern era.</a:t>
+            </a:r>
+          </a:p>
+          <a:p>
+            <a:r>
+              <a:rPr lang="en-US" dirty="0"/>
+              <a:t>Why are there no open source versions of this?</a:t>
+            </a:r>
+          </a:p>
+          <a:p>
+            <a:r>
+              <a:rPr lang="en-US" dirty="0"/>
+              <a:t>Proposed Solutions.</a:t>
+            </a:r>
+          </a:p>
+          <a:p>
+            <a:endParaRPr lang="en-US" dirty="0"/>
+          </a:p>
+        </p:txBody>
+      </p:sp>
+      <p:sp>
+        <p:nvSpPr>
+          <p:cNvPr id="4" name="Slide Number Placeholder 3">
+            <a:extLst>
+              <a:ext uri="{FF2B5EF4-FFF2-40B4-BE49-F238E27FC236}">
+                <a16:creationId xmlns:a16="http://schemas.microsoft.com/office/drawing/2014/main" id="{AE266D20-490F-86C8-D4FF-84E19BAEA5AD}"/>
+              </a:ext>
+            </a:extLst>
+          </p:cNvPr>
+          <p:cNvSpPr>
+            <a:spLocks noGrp="1"/>
+          </p:cNvSpPr>
+          <p:nvPr>
+            <p:ph type="sldNum" sz="quarter" idx="4"/>
+          </p:nvPr>
+        </p:nvSpPr>
+        <p:spPr/>
+        <p:txBody>
+          <a:bodyPr/>
+          <a:lstStyle/>
+          <a:p>
+            <a:fld id="{FA19DD11-D068-0E4A-8D95-134F79C17C0A}" type="slidenum">
+              <a:rPr lang="en-US" smtClean="0"/>
+              <a:pPr/>
+              <a:t>4</a:t>
+            </a:fld>
+            <a:endParaRPr lang="en-US"/>
+          </a:p>
+        </p:txBody>
+      </p:sp>
+    </p:spTree>
+    <p:extLst>
+      <p:ext uri="{BB962C8B-B14F-4D97-AF65-F5344CB8AC3E}">
+        <p14:creationId xmlns:p14="http://schemas.microsoft.com/office/powerpoint/2010/main" val="513418812"/>
+      </p:ext>
+    </p:extLst>
+  </p:cSld>
+  <p:clrMapOvr>
+    <a:masterClrMapping/>
+  </p:clrMapOvr>
+</p:sld>
+</file>
+
+<file path=ppt/slides/slide5.xml><?xml version="1.0" encoding="utf-8"?>
+<p:sld xmlns:a="http://schemas.openxmlformats.org/drawingml/2006/main" xmlns:r="http://schemas.openxmlformats.org/officeDocument/2006/relationships" xmlns:p="http://schemas.openxmlformats.org/presentationml/2006/main">
+  <p:cSld>
+    <p:spTree>
+      <p:nvGrpSpPr>
+        <p:cNvPr id="1" name=""/>
+        <p:cNvGrpSpPr/>
+        <p:nvPr/>
+      </p:nvGrpSpPr>
+      <p:grpSpPr>
+        <a:xfrm>
+          <a:off x="0" y="0"/>
+          <a:ext cx="0" cy="0"/>
+          <a:chOff x="0" y="0"/>
+          <a:chExt cx="0" cy="0"/>
+        </a:xfrm>
+      </p:grpSpPr>
+      <p:sp>
+        <p:nvSpPr>
+          <p:cNvPr id="2" name="Title 1">
+            <a:extLst>
+              <a:ext uri="{FF2B5EF4-FFF2-40B4-BE49-F238E27FC236}">
+                <a16:creationId xmlns:a16="http://schemas.microsoft.com/office/drawing/2014/main" id="{51259247-8C26-5969-6ADC-A4E242AEDF54}"/>
+              </a:ext>
+            </a:extLst>
+          </p:cNvPr>
+          <p:cNvSpPr>
+            <a:spLocks noGrp="1"/>
+          </p:cNvSpPr>
+          <p:nvPr>
+            <p:ph type="title"/>
+          </p:nvPr>
+        </p:nvSpPr>
+        <p:spPr/>
+        <p:txBody>
+          <a:bodyPr/>
+          <a:lstStyle/>
+          <a:p>
+            <a:r>
+              <a:rPr lang="en-US" dirty="0"/>
+              <a:t>Why are we here</a:t>
+            </a:r>
+          </a:p>
+        </p:txBody>
+      </p:sp>
+      <p:sp>
+        <p:nvSpPr>
+          <p:cNvPr id="3" name="Content Placeholder 2">
+            <a:extLst>
+              <a:ext uri="{FF2B5EF4-FFF2-40B4-BE49-F238E27FC236}">
+                <a16:creationId xmlns:a16="http://schemas.microsoft.com/office/drawing/2014/main" id="{2944B504-4B8E-AFD0-E242-4B033CFB561F}"/>
+              </a:ext>
+            </a:extLst>
+          </p:cNvPr>
+          <p:cNvSpPr>
+            <a:spLocks noGrp="1"/>
+          </p:cNvSpPr>
+          <p:nvPr>
+            <p:ph idx="1"/>
+          </p:nvPr>
+        </p:nvSpPr>
+        <p:spPr/>
+        <p:txBody>
+          <a:bodyPr/>
+          <a:lstStyle/>
+          <a:p>
+            <a:r>
+              <a:rPr lang="en-US" dirty="0"/>
+              <a:t>Who is charging you for HTTP? Just use Python AIOHTTP?</a:t>
+            </a:r>
+          </a:p>
+          <a:p>
+            <a:r>
+              <a:rPr lang="en-US" dirty="0"/>
+              <a:t>Yea.. well. About that.</a:t>
+            </a:r>
+          </a:p>
+          <a:p>
+            <a:endParaRPr lang="en-US" dirty="0"/>
+          </a:p>
+        </p:txBody>
+      </p:sp>
+      <p:sp>
+        <p:nvSpPr>
+          <p:cNvPr id="4" name="Slide Number Placeholder 3">
+            <a:extLst>
+              <a:ext uri="{FF2B5EF4-FFF2-40B4-BE49-F238E27FC236}">
+                <a16:creationId xmlns:a16="http://schemas.microsoft.com/office/drawing/2014/main" id="{D63464F3-9393-19C9-164D-4DEF03043D35}"/>
+              </a:ext>
+            </a:extLst>
+          </p:cNvPr>
+          <p:cNvSpPr>
+            <a:spLocks noGrp="1"/>
+          </p:cNvSpPr>
+          <p:nvPr>
+            <p:ph type="sldNum" sz="quarter" idx="4"/>
+          </p:nvPr>
+        </p:nvSpPr>
+        <p:spPr/>
+        <p:txBody>
+          <a:bodyPr/>
+          <a:lstStyle/>
+          <a:p>
+            <a:fld id="{FA19DD11-D068-0E4A-8D95-134F79C17C0A}" type="slidenum">
+              <a:rPr lang="en-US" smtClean="0"/>
+              <a:pPr/>
+              <a:t>5</a:t>
+            </a:fld>
+            <a:endParaRPr lang="en-US"/>
+          </a:p>
+        </p:txBody>
+      </p:sp>
+    </p:spTree>
+    <p:extLst>
+      <p:ext uri="{BB962C8B-B14F-4D97-AF65-F5344CB8AC3E}">
+        <p14:creationId xmlns:p14="http://schemas.microsoft.com/office/powerpoint/2010/main" val="1262385942"/>
+      </p:ext>
+    </p:extLst>
+  </p:cSld>
+  <p:clrMapOvr>
+    <a:masterClrMapping/>
+  </p:clrMapOvr>
+</p:sld>
+</file>
+
+<file path=ppt/slides/slide6.xml><?xml version="1.0" encoding="utf-8"?>
+<p:sld xmlns:a="http://schemas.openxmlformats.org/drawingml/2006/main" xmlns:r="http://schemas.openxmlformats.org/officeDocument/2006/relationships" xmlns:p="http://schemas.openxmlformats.org/presentationml/2006/main">
+  <p:cSld>
+    <p:spTree>
+      <p:nvGrpSpPr>
+        <p:cNvPr id="1" name=""/>
+        <p:cNvGrpSpPr/>
+        <p:nvPr/>
+      </p:nvGrpSpPr>
+      <p:grpSpPr>
+        <a:xfrm>
+          <a:off x="0" y="0"/>
+          <a:ext cx="0" cy="0"/>
+          <a:chOff x="0" y="0"/>
+          <a:chExt cx="0" cy="0"/>
+        </a:xfrm>
+      </p:grpSpPr>
+      <p:sp>
+        <p:nvSpPr>
+          <p:cNvPr id="2" name="Title 1">
+            <a:extLst>
+              <a:ext uri="{FF2B5EF4-FFF2-40B4-BE49-F238E27FC236}">
+                <a16:creationId xmlns:a16="http://schemas.microsoft.com/office/drawing/2014/main" id="{72296421-D797-2981-AF77-26562DD7D51D}"/>
+              </a:ext>
+            </a:extLst>
+          </p:cNvPr>
+          <p:cNvSpPr>
+            <a:spLocks noGrp="1"/>
+          </p:cNvSpPr>
+          <p:nvPr>
+            <p:ph type="title"/>
+          </p:nvPr>
+        </p:nvSpPr>
+        <p:spPr/>
+        <p:txBody>
+          <a:bodyPr/>
+          <a:lstStyle/>
+          <a:p>
+            <a:r>
+              <a:rPr lang="en-US" dirty="0"/>
+              <a:t>Who? Me?</a:t>
+            </a:r>
+          </a:p>
+        </p:txBody>
+      </p:sp>
+      <p:sp>
+        <p:nvSpPr>
+          <p:cNvPr id="3" name="Content Placeholder 2">
+            <a:extLst>
+              <a:ext uri="{FF2B5EF4-FFF2-40B4-BE49-F238E27FC236}">
+                <a16:creationId xmlns:a16="http://schemas.microsoft.com/office/drawing/2014/main" id="{D2531868-2F46-7EA1-258E-9677090584C9}"/>
+              </a:ext>
+            </a:extLst>
+          </p:cNvPr>
+          <p:cNvSpPr>
+            <a:spLocks noGrp="1"/>
+          </p:cNvSpPr>
+          <p:nvPr>
+            <p:ph idx="1"/>
+          </p:nvPr>
+        </p:nvSpPr>
+        <p:spPr/>
+        <p:txBody>
+          <a:bodyPr/>
+          <a:lstStyle/>
+          <a:p>
+            <a:r>
+              <a:rPr lang="en-US" dirty="0"/>
+              <a:t>Warren Fletcher</a:t>
+            </a:r>
+          </a:p>
+          <a:p>
+            <a:r>
+              <a:rPr lang="en-US" dirty="0"/>
+              <a:t>(Reformed) Web Scale Programmer ~ 10 years</a:t>
+            </a:r>
+          </a:p>
+          <a:p>
+            <a:r>
+              <a:rPr lang="en-US" dirty="0" err="1"/>
+              <a:t>Bsc</a:t>
+            </a:r>
+            <a:r>
+              <a:rPr lang="en-US" dirty="0"/>
+              <a:t>. in Electrical Engineering.</a:t>
+            </a:r>
+          </a:p>
+          <a:p>
+            <a:r>
+              <a:rPr lang="en-US" dirty="0"/>
+              <a:t>Been programming since I was small (well, smaller)</a:t>
+            </a:r>
+          </a:p>
+          <a:p>
+            <a:r>
+              <a:rPr lang="en-US" dirty="0"/>
+              <a:t>Staff Systems Engineer at Hydrogen Energy Applications</a:t>
+            </a:r>
+          </a:p>
+        </p:txBody>
+      </p:sp>
+      <p:sp>
+        <p:nvSpPr>
+          <p:cNvPr id="4" name="Slide Number Placeholder 3">
+            <a:extLst>
+              <a:ext uri="{FF2B5EF4-FFF2-40B4-BE49-F238E27FC236}">
+                <a16:creationId xmlns:a16="http://schemas.microsoft.com/office/drawing/2014/main" id="{012DDF91-FF2A-67EA-2373-B42485A8DF6E}"/>
+              </a:ext>
+            </a:extLst>
+          </p:cNvPr>
+          <p:cNvSpPr>
+            <a:spLocks noGrp="1"/>
+          </p:cNvSpPr>
+          <p:nvPr>
+            <p:ph type="sldNum" sz="quarter" idx="4"/>
+          </p:nvPr>
+        </p:nvSpPr>
+        <p:spPr/>
+        <p:txBody>
+          <a:bodyPr/>
+          <a:lstStyle/>
+          <a:p>
+            <a:fld id="{FA19DD11-D068-0E4A-8D95-134F79C17C0A}" type="slidenum">
+              <a:rPr lang="en-US" smtClean="0"/>
+              <a:pPr/>
+              <a:t>6</a:t>
+            </a:fld>
+            <a:endParaRPr lang="en-US"/>
+          </a:p>
+        </p:txBody>
+      </p:sp>
+    </p:spTree>
+    <p:extLst>
+      <p:ext uri="{BB962C8B-B14F-4D97-AF65-F5344CB8AC3E}">
+        <p14:creationId xmlns:p14="http://schemas.microsoft.com/office/powerpoint/2010/main" val="50830458"/>
+      </p:ext>
+    </p:extLst>
+  </p:cSld>
+  <p:clrMapOvr>
+    <a:masterClrMapping/>
+  </p:clrMapOvr>
+</p:sld>
+</file>
+
+<file path=ppt/slides/slide7.xml><?xml version="1.0" encoding="utf-8"?>
+<p:sld xmlns:a="http://schemas.openxmlformats.org/drawingml/2006/main" xmlns:r="http://schemas.openxmlformats.org/officeDocument/2006/relationships" xmlns:p="http://schemas.openxmlformats.org/presentationml/2006/main">
+  <p:cSld>
+    <p:spTree>
+      <p:nvGrpSpPr>
+        <p:cNvPr id="1" name=""/>
+        <p:cNvGrpSpPr/>
+        <p:nvPr/>
+      </p:nvGrpSpPr>
+      <p:grpSpPr>
+        <a:xfrm>
+          <a:off x="0" y="0"/>
+          <a:ext cx="0" cy="0"/>
+          <a:chOff x="0" y="0"/>
+          <a:chExt cx="0" cy="0"/>
+        </a:xfrm>
+      </p:grpSpPr>
+      <p:sp>
+        <p:nvSpPr>
+          <p:cNvPr id="2" name="Title 1">
+            <a:extLst>
+              <a:ext uri="{FF2B5EF4-FFF2-40B4-BE49-F238E27FC236}">
+                <a16:creationId xmlns:a16="http://schemas.microsoft.com/office/drawing/2014/main" id="{83076CE9-538B-269A-41C7-3D290662CA7F}"/>
+              </a:ext>
+            </a:extLst>
+          </p:cNvPr>
+          <p:cNvSpPr>
+            <a:spLocks noGrp="1"/>
+          </p:cNvSpPr>
+          <p:nvPr>
+            <p:ph type="title"/>
+          </p:nvPr>
+        </p:nvSpPr>
+        <p:spPr/>
+        <p:txBody>
+          <a:bodyPr/>
+          <a:lstStyle/>
+          <a:p>
+            <a:r>
+              <a:rPr lang="en-US" dirty="0"/>
+              <a:t>HYENA</a:t>
+            </a:r>
+          </a:p>
+        </p:txBody>
+      </p:sp>
+      <p:sp>
+        <p:nvSpPr>
+          <p:cNvPr id="3" name="Content Placeholder 2">
+            <a:extLst>
+              <a:ext uri="{FF2B5EF4-FFF2-40B4-BE49-F238E27FC236}">
+                <a16:creationId xmlns:a16="http://schemas.microsoft.com/office/drawing/2014/main" id="{EAEB28E4-87D6-7E35-E2C0-4E576E2CE995}"/>
+              </a:ext>
+            </a:extLst>
+          </p:cNvPr>
+          <p:cNvSpPr>
+            <a:spLocks noGrp="1"/>
+          </p:cNvSpPr>
+          <p:nvPr>
+            <p:ph idx="1"/>
+          </p:nvPr>
+        </p:nvSpPr>
+        <p:spPr/>
+        <p:txBody>
+          <a:bodyPr/>
+          <a:lstStyle/>
+          <a:p>
+            <a:r>
+              <a:rPr lang="en-US" dirty="0"/>
+              <a:t>We make diesel-generator alternatives.</a:t>
+            </a:r>
+          </a:p>
+          <a:p>
+            <a:r>
+              <a:rPr lang="en-US" dirty="0"/>
+              <a:t>Cleaner, Quieter, Smarter.</a:t>
+            </a:r>
+          </a:p>
+          <a:p>
+            <a:r>
+              <a:rPr lang="en-US" dirty="0"/>
+              <a:t>Based in </a:t>
+            </a:r>
+            <a:r>
+              <a:rPr lang="en-ZA" dirty="0"/>
+              <a:t>Muizenberg</a:t>
+            </a:r>
+            <a:r>
+              <a:rPr lang="en-US" dirty="0"/>
+              <a:t>, Cape Town, South Africa</a:t>
+            </a:r>
+          </a:p>
+        </p:txBody>
+      </p:sp>
+      <p:sp>
+        <p:nvSpPr>
+          <p:cNvPr id="4" name="Slide Number Placeholder 3">
+            <a:extLst>
+              <a:ext uri="{FF2B5EF4-FFF2-40B4-BE49-F238E27FC236}">
+                <a16:creationId xmlns:a16="http://schemas.microsoft.com/office/drawing/2014/main" id="{53F22499-2A9E-EA1E-31CC-2BC7E932538B}"/>
+              </a:ext>
+            </a:extLst>
+          </p:cNvPr>
+          <p:cNvSpPr>
+            <a:spLocks noGrp="1"/>
+          </p:cNvSpPr>
+          <p:nvPr>
+            <p:ph type="sldNum" sz="quarter" idx="4"/>
+          </p:nvPr>
+        </p:nvSpPr>
+        <p:spPr/>
+        <p:txBody>
+          <a:bodyPr/>
+          <a:lstStyle/>
+          <a:p>
+            <a:fld id="{FA19DD11-D068-0E4A-8D95-134F79C17C0A}" type="slidenum">
+              <a:rPr lang="en-US" smtClean="0"/>
+              <a:pPr/>
+              <a:t>7</a:t>
+            </a:fld>
+            <a:endParaRPr lang="en-US"/>
+          </a:p>
+        </p:txBody>
+      </p:sp>
+    </p:spTree>
+    <p:extLst>
+      <p:ext uri="{BB962C8B-B14F-4D97-AF65-F5344CB8AC3E}">
+        <p14:creationId xmlns:p14="http://schemas.microsoft.com/office/powerpoint/2010/main" val="634653553"/>
+      </p:ext>
+    </p:extLst>
+  </p:cSld>
+  <p:clrMapOvr>
+    <a:masterClrMapping/>
+  </p:clrMapOvr>
+</p:sld>
+</file>
+
+<file path=ppt/slides/slide8.xml><?xml version="1.0" encoding="utf-8"?>
+<p:sld xmlns:a="http://schemas.openxmlformats.org/drawingml/2006/main" xmlns:r="http://schemas.openxmlformats.org/officeDocument/2006/relationships" xmlns:p="http://schemas.openxmlformats.org/presentationml/2006/main">
+  <p:cSld>
+    <p:spTree>
+      <p:nvGrpSpPr>
+        <p:cNvPr id="1" name=""/>
+        <p:cNvGrpSpPr/>
+        <p:nvPr/>
+      </p:nvGrpSpPr>
+      <p:grpSpPr>
+        <a:xfrm>
+          <a:off x="0" y="0"/>
+          <a:ext cx="0" cy="0"/>
+          <a:chOff x="0" y="0"/>
+          <a:chExt cx="0" cy="0"/>
+        </a:xfrm>
+      </p:grpSpPr>
+      <p:sp>
+        <p:nvSpPr>
+          <p:cNvPr id="2" name="Title 1">
+            <a:extLst>
+              <a:ext uri="{FF2B5EF4-FFF2-40B4-BE49-F238E27FC236}">
+                <a16:creationId xmlns:a16="http://schemas.microsoft.com/office/drawing/2014/main" id="{1D281668-229E-4824-A9E9-C3D57DEBF796}"/>
+              </a:ext>
+            </a:extLst>
+          </p:cNvPr>
+          <p:cNvSpPr>
+            <a:spLocks noGrp="1"/>
+          </p:cNvSpPr>
+          <p:nvPr>
+            <p:ph type="title"/>
+          </p:nvPr>
+        </p:nvSpPr>
+        <p:spPr/>
+        <p:txBody>
+          <a:bodyPr/>
+          <a:lstStyle/>
+          <a:p>
+            <a:r>
+              <a:rPr lang="en-US" dirty="0"/>
+              <a:t>HYENA</a:t>
+            </a:r>
+          </a:p>
+        </p:txBody>
+      </p:sp>
+      <p:sp>
+        <p:nvSpPr>
+          <p:cNvPr id="3" name="Content Placeholder 2">
+            <a:extLst>
+              <a:ext uri="{FF2B5EF4-FFF2-40B4-BE49-F238E27FC236}">
+                <a16:creationId xmlns:a16="http://schemas.microsoft.com/office/drawing/2014/main" id="{27FF81C5-A565-EA8F-6E28-A6C991BA30F2}"/>
+              </a:ext>
+            </a:extLst>
+          </p:cNvPr>
+          <p:cNvSpPr>
+            <a:spLocks noGrp="1"/>
+          </p:cNvSpPr>
+          <p:nvPr>
+            <p:ph idx="1"/>
+          </p:nvPr>
+        </p:nvSpPr>
+        <p:spPr/>
+        <p:txBody>
+          <a:bodyPr/>
+          <a:lstStyle/>
+          <a:p>
+            <a:r>
+              <a:rPr lang="en-US" dirty="0"/>
+              <a:t>&lt;INSERT PHOTO OF HYENA STAFF&gt;</a:t>
+            </a:r>
+          </a:p>
+        </p:txBody>
+      </p:sp>
+      <p:sp>
+        <p:nvSpPr>
+          <p:cNvPr id="4" name="Slide Number Placeholder 3">
+            <a:extLst>
+              <a:ext uri="{FF2B5EF4-FFF2-40B4-BE49-F238E27FC236}">
+                <a16:creationId xmlns:a16="http://schemas.microsoft.com/office/drawing/2014/main" id="{9F2CD512-B424-A99D-07CB-09D724EDAB8C}"/>
+              </a:ext>
+            </a:extLst>
+          </p:cNvPr>
+          <p:cNvSpPr>
+            <a:spLocks noGrp="1"/>
+          </p:cNvSpPr>
+          <p:nvPr>
+            <p:ph type="sldNum" sz="quarter" idx="4"/>
+          </p:nvPr>
+        </p:nvSpPr>
+        <p:spPr/>
+        <p:txBody>
+          <a:bodyPr/>
+          <a:lstStyle/>
+          <a:p>
+            <a:fld id="{FA19DD11-D068-0E4A-8D95-134F79C17C0A}" type="slidenum">
+              <a:rPr lang="en-US" smtClean="0"/>
+              <a:pPr/>
+              <a:t>8</a:t>
+            </a:fld>
+            <a:endParaRPr lang="en-US"/>
+          </a:p>
+        </p:txBody>
+      </p:sp>
+    </p:spTree>
+    <p:extLst>
+      <p:ext uri="{BB962C8B-B14F-4D97-AF65-F5344CB8AC3E}">
+        <p14:creationId xmlns:p14="http://schemas.microsoft.com/office/powerpoint/2010/main" val="1044917703"/>
+      </p:ext>
+    </p:extLst>
+  </p:cSld>
+  <p:clrMapOvr>
+    <a:masterClrMapping/>
+  </p:clrMapOvr>
+</p:sld>
+</file>
+
+<file path=ppt/slides/slide9.xml><?xml version="1.0" encoding="utf-8"?>
+<p:sld xmlns:a="http://schemas.openxmlformats.org/drawingml/2006/main" xmlns:r="http://schemas.openxmlformats.org/officeDocument/2006/relationships" xmlns:p="http://schemas.openxmlformats.org/presentationml/2006/main">
+  <p:cSld>
+    <p:spTree>
+      <p:nvGrpSpPr>
+        <p:cNvPr id="1" name=""/>
+        <p:cNvGrpSpPr/>
+        <p:nvPr/>
+      </p:nvGrpSpPr>
+      <p:grpSpPr>
+        <a:xfrm>
+          <a:off x="0" y="0"/>
+          <a:ext cx="0" cy="0"/>
+          <a:chOff x="0" y="0"/>
+          <a:chExt cx="0" cy="0"/>
+        </a:xfrm>
+      </p:grpSpPr>
+      <p:sp>
+        <p:nvSpPr>
+          <p:cNvPr id="2" name="Title 1">
+            <a:extLst>
+              <a:ext uri="{FF2B5EF4-FFF2-40B4-BE49-F238E27FC236}">
+                <a16:creationId xmlns:a16="http://schemas.microsoft.com/office/drawing/2014/main" id="{B9FF1794-8456-513A-C01F-874F78EFFC13}"/>
+              </a:ext>
+            </a:extLst>
+          </p:cNvPr>
+          <p:cNvSpPr>
+            <a:spLocks noGrp="1"/>
+          </p:cNvSpPr>
+          <p:nvPr>
+            <p:ph type="title"/>
+          </p:nvPr>
+        </p:nvSpPr>
+        <p:spPr/>
+        <p:txBody>
+          <a:bodyPr/>
+          <a:lstStyle/>
+          <a:p>
+            <a:r>
+              <a:rPr lang="en-US" dirty="0"/>
+              <a:t>HYENA</a:t>
+            </a:r>
+          </a:p>
+        </p:txBody>
+      </p:sp>
+      <p:sp>
+        <p:nvSpPr>
+          <p:cNvPr id="3" name="Content Placeholder 2">
+            <a:extLst>
+              <a:ext uri="{FF2B5EF4-FFF2-40B4-BE49-F238E27FC236}">
+                <a16:creationId xmlns:a16="http://schemas.microsoft.com/office/drawing/2014/main" id="{34768277-89B0-7E00-97AE-77A382945D86}"/>
+              </a:ext>
+            </a:extLst>
+          </p:cNvPr>
+          <p:cNvSpPr>
+            <a:spLocks noGrp="1"/>
+          </p:cNvSpPr>
+          <p:nvPr>
+            <p:ph idx="1"/>
+          </p:nvPr>
+        </p:nvSpPr>
+        <p:spPr/>
+        <p:txBody>
+          <a:bodyPr/>
+          <a:lstStyle/>
+          <a:p>
+            <a:r>
+              <a:rPr lang="en-US" dirty="0"/>
+              <a:t>We convert the hydrogen in LPG to electricity via a fuel cell.</a:t>
+            </a:r>
+          </a:p>
+          <a:p>
+            <a:r>
+              <a:rPr lang="en-US" dirty="0"/>
+              <a:t>Transitionary technology to the Green Hydrogen Economy</a:t>
+            </a:r>
+          </a:p>
+          <a:p>
+            <a:r>
+              <a:rPr lang="en-US" dirty="0"/>
+              <a:t>Build units in the 5 – 20 Kw range.</a:t>
+            </a:r>
+          </a:p>
+        </p:txBody>
+      </p:sp>
+      <p:sp>
+        <p:nvSpPr>
+          <p:cNvPr id="4" name="Slide Number Placeholder 3">
+            <a:extLst>
+              <a:ext uri="{FF2B5EF4-FFF2-40B4-BE49-F238E27FC236}">
+                <a16:creationId xmlns:a16="http://schemas.microsoft.com/office/drawing/2014/main" id="{9184C4DF-6B8C-6F7B-FD27-1FCB2AD1A237}"/>
+              </a:ext>
+            </a:extLst>
+          </p:cNvPr>
+          <p:cNvSpPr>
+            <a:spLocks noGrp="1"/>
+          </p:cNvSpPr>
+          <p:nvPr>
+            <p:ph type="sldNum" sz="quarter" idx="4"/>
+          </p:nvPr>
+        </p:nvSpPr>
+        <p:spPr/>
+        <p:txBody>
+          <a:bodyPr/>
+          <a:lstStyle/>
+          <a:p>
+            <a:fld id="{FA19DD11-D068-0E4A-8D95-134F79C17C0A}" type="slidenum">
+              <a:rPr lang="en-US" smtClean="0"/>
+              <a:pPr/>
+              <a:t>9</a:t>
+            </a:fld>
+            <a:endParaRPr lang="en-US"/>
+          </a:p>
+        </p:txBody>
+      </p:sp>
+    </p:spTree>
+    <p:extLst>
+      <p:ext uri="{BB962C8B-B14F-4D97-AF65-F5344CB8AC3E}">
+        <p14:creationId xmlns:p14="http://schemas.microsoft.com/office/powerpoint/2010/main" val="164210202"/>
       </p:ext>
     </p:extLst>
   </p:cSld>
@@ -3173,17 +8202,6 @@
 </file>
 
 <file path=customXml/item1.xml><?xml version="1.0" encoding="utf-8"?>
-<p:properties xmlns:p="http://schemas.microsoft.com/office/2006/metadata/properties" xmlns:xsi="http://www.w3.org/2001/XMLSchema-instance" xmlns:pc="http://schemas.microsoft.com/office/infopath/2007/PartnerControls">
-  <documentManagement>
-    <lcf76f155ced4ddcb4097134ff3c332f xmlns="2ce3f65b-a440-44fc-b359-623bc8031d7f">
-      <Terms xmlns="http://schemas.microsoft.com/office/infopath/2007/PartnerControls"/>
-    </lcf76f155ced4ddcb4097134ff3c332f>
-    <TaxCatchAll xmlns="a35618ab-0886-4825-b12b-453b0fa4c1c2" xsi:nil="true"/>
-  </documentManagement>
-</p:properties>
-</file>
-
-<file path=customXml/item2.xml><?xml version="1.0" encoding="utf-8"?>
 <?mso-contentType ?>
 <FormTemplates xmlns="http://schemas.microsoft.com/sharepoint/v3/contenttype/forms">
   <Display>DocumentLibraryForm</Display>
@@ -3192,7 +8210,7 @@
 </FormTemplates>
 </file>
 
-<file path=customXml/item3.xml><?xml version="1.0" encoding="utf-8"?>
+<file path=customXml/item2.xml><?xml version="1.0" encoding="utf-8"?>
 <ct:contentTypeSchema xmlns:ct="http://schemas.microsoft.com/office/2006/metadata/contentType" xmlns:ma="http://schemas.microsoft.com/office/2006/metadata/properties/metaAttributes" ct:_="" ma:_="" ma:contentTypeName="Document" ma:contentTypeID="0x01010046ABBC41DB284D4AA9A564D4936243A4" ma:contentTypeVersion="10" ma:contentTypeDescription="Create a new document." ma:contentTypeScope="" ma:versionID="f3d0c97be197659e0fbf45be14ff19f7">
   <xsd:schema xmlns:xsd="http://www.w3.org/2001/XMLSchema" xmlns:xs="http://www.w3.org/2001/XMLSchema" xmlns:p="http://schemas.microsoft.com/office/2006/metadata/properties" xmlns:ns2="2ce3f65b-a440-44fc-b359-623bc8031d7f" xmlns:ns3="a35618ab-0886-4825-b12b-453b0fa4c1c2" targetNamespace="http://schemas.microsoft.com/office/2006/metadata/properties" ma:root="true" ma:fieldsID="f90176ce7b58b70318a20115648e482d" ns2:_="" ns3:_="">
     <xsd:import namespace="2ce3f65b-a440-44fc-b359-623bc8031d7f"/>
@@ -3381,24 +8399,18 @@
 </ct:contentTypeSchema>
 </file>
 
-<file path=customXml/itemProps1.xml><?xml version="1.0" encoding="utf-8"?>
-<ds:datastoreItem xmlns:ds="http://schemas.openxmlformats.org/officeDocument/2006/customXml" ds:itemID="{873BBE98-0C10-4CB2-B80B-4F79840A1265}">
-  <ds:schemaRefs>
-    <ds:schemaRef ds:uri="http://www.w3.org/XML/1998/namespace"/>
-    <ds:schemaRef ds:uri="2ce3f65b-a440-44fc-b359-623bc8031d7f"/>
-    <ds:schemaRef ds:uri="http://purl.org/dc/dcmitype/"/>
-    <ds:schemaRef ds:uri="http://schemas.microsoft.com/office/2006/documentManagement/types"/>
-    <ds:schemaRef ds:uri="http://schemas.microsoft.com/office/2006/metadata/properties"/>
-    <ds:schemaRef ds:uri="http://purl.org/dc/terms/"/>
-    <ds:schemaRef ds:uri="http://schemas.openxmlformats.org/package/2006/metadata/core-properties"/>
-    <ds:schemaRef ds:uri="http://schemas.microsoft.com/office/infopath/2007/PartnerControls"/>
-    <ds:schemaRef ds:uri="a35618ab-0886-4825-b12b-453b0fa4c1c2"/>
-    <ds:schemaRef ds:uri="http://purl.org/dc/elements/1.1/"/>
-  </ds:schemaRefs>
-</ds:datastoreItem>
+<file path=customXml/item3.xml><?xml version="1.0" encoding="utf-8"?>
+<p:properties xmlns:p="http://schemas.microsoft.com/office/2006/metadata/properties" xmlns:xsi="http://www.w3.org/2001/XMLSchema-instance" xmlns:pc="http://schemas.microsoft.com/office/infopath/2007/PartnerControls">
+  <documentManagement>
+    <lcf76f155ced4ddcb4097134ff3c332f xmlns="2ce3f65b-a440-44fc-b359-623bc8031d7f">
+      <Terms xmlns="http://schemas.microsoft.com/office/infopath/2007/PartnerControls"/>
+    </lcf76f155ced4ddcb4097134ff3c332f>
+    <TaxCatchAll xmlns="a35618ab-0886-4825-b12b-453b0fa4c1c2" xsi:nil="true"/>
+  </documentManagement>
+</p:properties>
 </file>
 
-<file path=customXml/itemProps2.xml><?xml version="1.0" encoding="utf-8"?>
+<file path=customXml/itemProps1.xml><?xml version="1.0" encoding="utf-8"?>
 <ds:datastoreItem xmlns:ds="http://schemas.openxmlformats.org/officeDocument/2006/customXml" ds:itemID="{F02BFA56-EC62-47C1-99A3-95754EA42EB9}">
   <ds:schemaRefs>
     <ds:schemaRef ds:uri="http://schemas.microsoft.com/sharepoint/v3/contenttype/forms"/>
@@ -3406,7 +8418,7 @@
 </ds:datastoreItem>
 </file>
 
-<file path=customXml/itemProps3.xml><?xml version="1.0" encoding="utf-8"?>
+<file path=customXml/itemProps2.xml><?xml version="1.0" encoding="utf-8"?>
 <ds:datastoreItem xmlns:ds="http://schemas.openxmlformats.org/officeDocument/2006/customXml" ds:itemID="{8901D088-D3A6-4838-B927-FBC520DE5B7D}">
   <ds:schemaRefs>
     <ds:schemaRef ds:uri="http://schemas.microsoft.com/office/2006/metadata/contentType"/>
@@ -3423,4 +8435,21 @@
     <ds:schemaRef ds:uri="http://schemas.microsoft.com/internal/obd"/>
   </ds:schemaRefs>
 </ds:datastoreItem>
+</file>
+
+<file path=customXml/itemProps3.xml><?xml version="1.0" encoding="utf-8"?>
+<ds:datastoreItem xmlns:ds="http://schemas.openxmlformats.org/officeDocument/2006/customXml" ds:itemID="{873BBE98-0C10-4CB2-B80B-4F79840A1265}">
+  <ds:schemaRefs>
+    <ds:schemaRef ds:uri="http://www.w3.org/XML/1998/namespace"/>
+    <ds:schemaRef ds:uri="2ce3f65b-a440-44fc-b359-623bc8031d7f"/>
+    <ds:schemaRef ds:uri="http://purl.org/dc/dcmitype/"/>
+    <ds:schemaRef ds:uri="http://schemas.microsoft.com/office/2006/documentManagement/types"/>
+    <ds:schemaRef ds:uri="http://schemas.microsoft.com/office/2006/metadata/properties"/>
+    <ds:schemaRef ds:uri="http://purl.org/dc/terms/"/>
+    <ds:schemaRef ds:uri="http://schemas.openxmlformats.org/package/2006/metadata/core-properties"/>
+    <ds:schemaRef ds:uri="http://schemas.microsoft.com/office/infopath/2007/PartnerControls"/>
+    <ds:schemaRef ds:uri="a35618ab-0886-4825-b12b-453b0fa4c1c2"/>
+    <ds:schemaRef ds:uri="http://purl.org/dc/elements/1.1/"/>
+  </ds:schemaRefs>
+</ds:datastoreItem>
 </file>